--- a/Pregrado/Trabajo de grado 2/Clases/Sesion 10 - Socialización de avances/Presentacion.pptx
+++ b/Pregrado/Trabajo de grado 2/Clases/Sesion 10 - Socialización de avances/Presentacion.pptx
@@ -3361,41 +3361,6 @@
                 <a:latin typeface="Calibri"/>
               </a:rPr>
               <a:t> TRABAJO DE GRADO 2</a:t>
-            </a:r>
-          </a:p>
-        </p:txBody>
-      </p:sp>
-      <p:sp>
-        <p:nvSpPr>
-          <p:cNvPr id="7" name="TextBox 6"/>
-          <p:cNvSpPr txBox="1"/>
-          <p:nvPr/>
-        </p:nvSpPr>
-        <p:spPr>
-          <a:xfrm>
-            <a:off x="2194560" y="6446520"/>
-            <a:ext cx="5943600" cy="274320"/>
-          </a:xfrm>
-          <a:prstGeom prst="rect">
-            <a:avLst/>
-          </a:prstGeom>
-          <a:noFill/>
-        </p:spPr>
-        <p:txBody>
-          <a:bodyPr wrap="square" anchor="t" lIns="0" rIns="0" tIns="0" bIns="0">
-            <a:spAutoFit/>
-          </a:bodyPr>
-          <a:lstStyle/>
-          <a:p>
-            <a:pPr algn="l"/>
-            <a:r>
-              <a:rPr sz="1000" b="1" i="0">
-                <a:solidFill>
-                  <a:srgbClr val="8F989D"/>
-                </a:solidFill>
-                <a:latin typeface="Calibri"/>
-              </a:rPr>
-              <a:t>Inicio 5:10 pm</a:t>
             </a:r>
           </a:p>
         </p:txBody>
@@ -4071,41 +4036,6 @@
         </p:nvSpPr>
         <p:spPr>
           <a:xfrm>
-            <a:off x="2194560" y="6446520"/>
-            <a:ext cx="5943600" cy="274320"/>
-          </a:xfrm>
-          <a:prstGeom prst="rect">
-            <a:avLst/>
-          </a:prstGeom>
-          <a:noFill/>
-        </p:spPr>
-        <p:txBody>
-          <a:bodyPr wrap="square" anchor="t" lIns="0" rIns="0" tIns="0" bIns="0">
-            <a:spAutoFit/>
-          </a:bodyPr>
-          <a:lstStyle/>
-          <a:p>
-            <a:pPr algn="l"/>
-            <a:r>
-              <a:rPr sz="1000" b="1" i="0">
-                <a:solidFill>
-                  <a:srgbClr val="8F989D"/>
-                </a:solidFill>
-                <a:latin typeface="Calibri"/>
-              </a:rPr>
-              <a:t>Inicio 5:10 pm</a:t>
-            </a:r>
-          </a:p>
-        </p:txBody>
-      </p:sp>
-      <p:sp>
-        <p:nvSpPr>
-          <p:cNvPr id="7" name="TextBox 6"/>
-          <p:cNvSpPr txBox="1"/>
-          <p:nvPr/>
-        </p:nvSpPr>
-        <p:spPr>
-          <a:xfrm>
             <a:off x="11094415" y="6446520"/>
             <a:ext cx="548640" cy="274320"/>
           </a:xfrm>
@@ -4528,41 +4458,6 @@
         </p:nvSpPr>
         <p:spPr>
           <a:xfrm>
-            <a:off x="2194560" y="6446520"/>
-            <a:ext cx="5943600" cy="274320"/>
-          </a:xfrm>
-          <a:prstGeom prst="rect">
-            <a:avLst/>
-          </a:prstGeom>
-          <a:noFill/>
-        </p:spPr>
-        <p:txBody>
-          <a:bodyPr wrap="square" anchor="t" lIns="0" rIns="0" tIns="0" bIns="0">
-            <a:spAutoFit/>
-          </a:bodyPr>
-          <a:lstStyle/>
-          <a:p>
-            <a:pPr algn="l"/>
-            <a:r>
-              <a:rPr sz="1000" b="1" i="0">
-                <a:solidFill>
-                  <a:srgbClr val="8F989D"/>
-                </a:solidFill>
-                <a:latin typeface="Calibri"/>
-              </a:rPr>
-              <a:t>Inicio 5:10 pm</a:t>
-            </a:r>
-          </a:p>
-        </p:txBody>
-      </p:sp>
-      <p:sp>
-        <p:nvSpPr>
-          <p:cNvPr id="11" name="TextBox 10"/>
-          <p:cNvSpPr txBox="1"/>
-          <p:nvPr/>
-        </p:nvSpPr>
-        <p:spPr>
-          <a:xfrm>
             <a:off x="11094415" y="6446520"/>
             <a:ext cx="548640" cy="274320"/>
           </a:xfrm>
@@ -4797,41 +4692,6 @@
         </p:nvSpPr>
         <p:spPr>
           <a:xfrm>
-            <a:off x="2194560" y="6446520"/>
-            <a:ext cx="5943600" cy="274320"/>
-          </a:xfrm>
-          <a:prstGeom prst="rect">
-            <a:avLst/>
-          </a:prstGeom>
-          <a:noFill/>
-        </p:spPr>
-        <p:txBody>
-          <a:bodyPr wrap="square" anchor="t" lIns="0" rIns="0" tIns="0" bIns="0">
-            <a:spAutoFit/>
-          </a:bodyPr>
-          <a:lstStyle/>
-          <a:p>
-            <a:pPr algn="l"/>
-            <a:r>
-              <a:rPr sz="1000" b="1" i="0">
-                <a:solidFill>
-                  <a:srgbClr val="8F989D"/>
-                </a:solidFill>
-                <a:latin typeface="Calibri"/>
-              </a:rPr>
-              <a:t>Inicio 5:10 pm</a:t>
-            </a:r>
-          </a:p>
-        </p:txBody>
-      </p:sp>
-      <p:sp>
-        <p:nvSpPr>
-          <p:cNvPr id="7" name="TextBox 6"/>
-          <p:cNvSpPr txBox="1"/>
-          <p:nvPr/>
-        </p:nvSpPr>
-        <p:spPr>
-          <a:xfrm>
             <a:off x="11094415" y="6446520"/>
             <a:ext cx="548640" cy="274320"/>
           </a:xfrm>
@@ -5357,41 +5217,6 @@
         </p:nvSpPr>
         <p:spPr>
           <a:xfrm>
-            <a:off x="2194560" y="6446520"/>
-            <a:ext cx="5943600" cy="274320"/>
-          </a:xfrm>
-          <a:prstGeom prst="rect">
-            <a:avLst/>
-          </a:prstGeom>
-          <a:noFill/>
-        </p:spPr>
-        <p:txBody>
-          <a:bodyPr wrap="square" anchor="t" lIns="0" rIns="0" tIns="0" bIns="0">
-            <a:spAutoFit/>
-          </a:bodyPr>
-          <a:lstStyle/>
-          <a:p>
-            <a:pPr algn="l"/>
-            <a:r>
-              <a:rPr sz="1000" b="1" i="0">
-                <a:solidFill>
-                  <a:srgbClr val="8F989D"/>
-                </a:solidFill>
-                <a:latin typeface="Calibri"/>
-              </a:rPr>
-              <a:t>Inicio 5:10 pm</a:t>
-            </a:r>
-          </a:p>
-        </p:txBody>
-      </p:sp>
-      <p:sp>
-        <p:nvSpPr>
-          <p:cNvPr id="6" name="TextBox 5"/>
-          <p:cNvSpPr txBox="1"/>
-          <p:nvPr/>
-        </p:nvSpPr>
-        <p:spPr>
-          <a:xfrm>
             <a:off x="11094415" y="6446520"/>
             <a:ext cx="548640" cy="274320"/>
           </a:xfrm>
@@ -5421,7 +5246,7 @@
       </p:sp>
       <p:sp>
         <p:nvSpPr>
-          <p:cNvPr id="7" name="TextBox 6"/>
+          <p:cNvPr id="6" name="TextBox 5"/>
           <p:cNvSpPr txBox="1"/>
           <p:nvPr/>
         </p:nvSpPr>
@@ -5773,41 +5598,6 @@
         </p:nvSpPr>
         <p:spPr>
           <a:xfrm>
-            <a:off x="2194560" y="6446520"/>
-            <a:ext cx="5943600" cy="274320"/>
-          </a:xfrm>
-          <a:prstGeom prst="rect">
-            <a:avLst/>
-          </a:prstGeom>
-          <a:noFill/>
-        </p:spPr>
-        <p:txBody>
-          <a:bodyPr wrap="square" anchor="t" lIns="0" rIns="0" tIns="0" bIns="0">
-            <a:spAutoFit/>
-          </a:bodyPr>
-          <a:lstStyle/>
-          <a:p>
-            <a:pPr algn="l"/>
-            <a:r>
-              <a:rPr sz="1000" b="1" i="0">
-                <a:solidFill>
-                  <a:srgbClr val="8F989D"/>
-                </a:solidFill>
-                <a:latin typeface="Calibri"/>
-              </a:rPr>
-              <a:t>Inicio 5:10 pm</a:t>
-            </a:r>
-          </a:p>
-        </p:txBody>
-      </p:sp>
-      <p:sp>
-        <p:nvSpPr>
-          <p:cNvPr id="6" name="TextBox 5"/>
-          <p:cNvSpPr txBox="1"/>
-          <p:nvPr/>
-        </p:nvSpPr>
-        <p:spPr>
-          <a:xfrm>
             <a:off x="11094415" y="6446520"/>
             <a:ext cx="548640" cy="274320"/>
           </a:xfrm>
@@ -6263,41 +6053,6 @@
         </p:nvSpPr>
         <p:spPr>
           <a:xfrm>
-            <a:off x="2194560" y="6446520"/>
-            <a:ext cx="5943600" cy="274320"/>
-          </a:xfrm>
-          <a:prstGeom prst="rect">
-            <a:avLst/>
-          </a:prstGeom>
-          <a:noFill/>
-        </p:spPr>
-        <p:txBody>
-          <a:bodyPr wrap="square" anchor="t" lIns="0" rIns="0" tIns="0" bIns="0">
-            <a:spAutoFit/>
-          </a:bodyPr>
-          <a:lstStyle/>
-          <a:p>
-            <a:pPr algn="l"/>
-            <a:r>
-              <a:rPr sz="1000" b="1" i="0">
-                <a:solidFill>
-                  <a:srgbClr val="8F989D"/>
-                </a:solidFill>
-                <a:latin typeface="Calibri"/>
-              </a:rPr>
-              <a:t>Inicio 5:10 pm</a:t>
-            </a:r>
-          </a:p>
-        </p:txBody>
-      </p:sp>
-      <p:sp>
-        <p:nvSpPr>
-          <p:cNvPr id="6" name="TextBox 5"/>
-          <p:cNvSpPr txBox="1"/>
-          <p:nvPr/>
-        </p:nvSpPr>
-        <p:spPr>
-          <a:xfrm>
             <a:off x="11094415" y="6446520"/>
             <a:ext cx="548640" cy="274320"/>
           </a:xfrm>
@@ -6589,41 +6344,6 @@
         </p:nvSpPr>
         <p:spPr>
           <a:xfrm>
-            <a:off x="2194560" y="6446520"/>
-            <a:ext cx="5943600" cy="274320"/>
-          </a:xfrm>
-          <a:prstGeom prst="rect">
-            <a:avLst/>
-          </a:prstGeom>
-          <a:noFill/>
-        </p:spPr>
-        <p:txBody>
-          <a:bodyPr wrap="square" anchor="t" lIns="0" rIns="0" tIns="0" bIns="0">
-            <a:spAutoFit/>
-          </a:bodyPr>
-          <a:lstStyle/>
-          <a:p>
-            <a:pPr algn="l"/>
-            <a:r>
-              <a:rPr sz="1000" b="1" i="0">
-                <a:solidFill>
-                  <a:srgbClr val="8F989D"/>
-                </a:solidFill>
-                <a:latin typeface="Calibri"/>
-              </a:rPr>
-              <a:t>Inicio 5:10 pm</a:t>
-            </a:r>
-          </a:p>
-        </p:txBody>
-      </p:sp>
-      <p:sp>
-        <p:nvSpPr>
-          <p:cNvPr id="6" name="TextBox 5"/>
-          <p:cNvSpPr txBox="1"/>
-          <p:nvPr/>
-        </p:nvSpPr>
-        <p:spPr>
-          <a:xfrm>
             <a:off x="11094415" y="6446520"/>
             <a:ext cx="548640" cy="274320"/>
           </a:xfrm>
@@ -6901,41 +6621,6 @@
         </p:nvSpPr>
         <p:spPr>
           <a:xfrm>
-            <a:off x="2194560" y="6446520"/>
-            <a:ext cx="5943600" cy="274320"/>
-          </a:xfrm>
-          <a:prstGeom prst="rect">
-            <a:avLst/>
-          </a:prstGeom>
-          <a:noFill/>
-        </p:spPr>
-        <p:txBody>
-          <a:bodyPr wrap="square" anchor="t" lIns="0" rIns="0" tIns="0" bIns="0">
-            <a:spAutoFit/>
-          </a:bodyPr>
-          <a:lstStyle/>
-          <a:p>
-            <a:pPr algn="l"/>
-            <a:r>
-              <a:rPr sz="1000" b="1" i="0">
-                <a:solidFill>
-                  <a:srgbClr val="8F989D"/>
-                </a:solidFill>
-                <a:latin typeface="Calibri"/>
-              </a:rPr>
-              <a:t>Inicio 5:10 pm</a:t>
-            </a:r>
-          </a:p>
-        </p:txBody>
-      </p:sp>
-      <p:sp>
-        <p:nvSpPr>
-          <p:cNvPr id="6" name="TextBox 5"/>
-          <p:cNvSpPr txBox="1"/>
-          <p:nvPr/>
-        </p:nvSpPr>
-        <p:spPr>
-          <a:xfrm>
             <a:off x="11094415" y="6446520"/>
             <a:ext cx="548640" cy="274320"/>
           </a:xfrm>
@@ -7182,41 +6867,6 @@
           </a:p>
         </p:txBody>
       </p:sp>
-      <p:sp>
-        <p:nvSpPr>
-          <p:cNvPr id="7" name="TextBox 6"/>
-          <p:cNvSpPr txBox="1"/>
-          <p:nvPr/>
-        </p:nvSpPr>
-        <p:spPr>
-          <a:xfrm>
-            <a:off x="2194560" y="6446520"/>
-            <a:ext cx="5943600" cy="274320"/>
-          </a:xfrm>
-          <a:prstGeom prst="rect">
-            <a:avLst/>
-          </a:prstGeom>
-          <a:noFill/>
-        </p:spPr>
-        <p:txBody>
-          <a:bodyPr wrap="square" anchor="t" lIns="0" rIns="0" tIns="0" bIns="0">
-            <a:spAutoFit/>
-          </a:bodyPr>
-          <a:lstStyle/>
-          <a:p>
-            <a:pPr algn="l"/>
-            <a:r>
-              <a:rPr sz="1000" b="1" i="0">
-                <a:solidFill>
-                  <a:srgbClr val="8F989D"/>
-                </a:solidFill>
-                <a:latin typeface="Calibri"/>
-              </a:rPr>
-              <a:t>Inicio 5:10 pm</a:t>
-            </a:r>
-          </a:p>
-        </p:txBody>
-      </p:sp>
     </p:spTree>
   </p:cSld>
   <p:clrMapOvr>
@@ -7519,41 +7169,6 @@
         </p:nvSpPr>
         <p:spPr>
           <a:xfrm>
-            <a:off x="2194560" y="6446520"/>
-            <a:ext cx="5943600" cy="274320"/>
-          </a:xfrm>
-          <a:prstGeom prst="rect">
-            <a:avLst/>
-          </a:prstGeom>
-          <a:noFill/>
-        </p:spPr>
-        <p:txBody>
-          <a:bodyPr wrap="square" anchor="t" lIns="0" rIns="0" tIns="0" bIns="0">
-            <a:spAutoFit/>
-          </a:bodyPr>
-          <a:lstStyle/>
-          <a:p>
-            <a:pPr algn="l"/>
-            <a:r>
-              <a:rPr sz="1000" b="1" i="0">
-                <a:solidFill>
-                  <a:srgbClr val="8F989D"/>
-                </a:solidFill>
-                <a:latin typeface="Calibri"/>
-              </a:rPr>
-              <a:t>Inicio 5:10 pm</a:t>
-            </a:r>
-          </a:p>
-        </p:txBody>
-      </p:sp>
-      <p:sp>
-        <p:nvSpPr>
-          <p:cNvPr id="6" name="TextBox 5"/>
-          <p:cNvSpPr txBox="1"/>
-          <p:nvPr/>
-        </p:nvSpPr>
-        <p:spPr>
-          <a:xfrm>
             <a:off x="11094415" y="6446520"/>
             <a:ext cx="548640" cy="274320"/>
           </a:xfrm>
@@ -7583,7 +7198,7 @@
       </p:sp>
       <p:sp>
         <p:nvSpPr>
-          <p:cNvPr id="7" name="TextBox 6"/>
+          <p:cNvPr id="6" name="TextBox 5"/>
           <p:cNvSpPr txBox="1"/>
           <p:nvPr/>
         </p:nvSpPr>
@@ -7966,41 +7581,6 @@
       <p:sp>
         <p:nvSpPr>
           <p:cNvPr id="5" name="TextBox 4"/>
-          <p:cNvSpPr txBox="1"/>
-          <p:nvPr/>
-        </p:nvSpPr>
-        <p:spPr>
-          <a:xfrm>
-            <a:off x="2194560" y="6446520"/>
-            <a:ext cx="5943600" cy="274320"/>
-          </a:xfrm>
-          <a:prstGeom prst="rect">
-            <a:avLst/>
-          </a:prstGeom>
-          <a:noFill/>
-        </p:spPr>
-        <p:txBody>
-          <a:bodyPr wrap="square" anchor="t" lIns="0" rIns="0" tIns="0" bIns="0">
-            <a:spAutoFit/>
-          </a:bodyPr>
-          <a:lstStyle/>
-          <a:p>
-            <a:pPr algn="l"/>
-            <a:r>
-              <a:rPr sz="1000" b="1" i="0">
-                <a:solidFill>
-                  <a:srgbClr val="8F989D"/>
-                </a:solidFill>
-                <a:latin typeface="Calibri"/>
-              </a:rPr>
-              <a:t>Inicio 5:10 pm</a:t>
-            </a:r>
-          </a:p>
-        </p:txBody>
-      </p:sp>
-      <p:sp>
-        <p:nvSpPr>
-          <p:cNvPr id="6" name="TextBox 5"/>
           <p:cNvSpPr txBox="1"/>
           <p:nvPr/>
         </p:nvSpPr>
@@ -8678,41 +8258,6 @@
         </p:nvSpPr>
         <p:spPr>
           <a:xfrm>
-            <a:off x="2194560" y="6446520"/>
-            <a:ext cx="5943600" cy="274320"/>
-          </a:xfrm>
-          <a:prstGeom prst="rect">
-            <a:avLst/>
-          </a:prstGeom>
-          <a:noFill/>
-        </p:spPr>
-        <p:txBody>
-          <a:bodyPr wrap="square" anchor="t" lIns="0" rIns="0" tIns="0" bIns="0">
-            <a:spAutoFit/>
-          </a:bodyPr>
-          <a:lstStyle/>
-          <a:p>
-            <a:pPr algn="l"/>
-            <a:r>
-              <a:rPr sz="1000" b="1" i="0">
-                <a:solidFill>
-                  <a:srgbClr val="8F989D"/>
-                </a:solidFill>
-                <a:latin typeface="Calibri"/>
-              </a:rPr>
-              <a:t>Inicio 5:10 pm</a:t>
-            </a:r>
-          </a:p>
-        </p:txBody>
-      </p:sp>
-      <p:sp>
-        <p:nvSpPr>
-          <p:cNvPr id="7" name="TextBox 6"/>
-          <p:cNvSpPr txBox="1"/>
-          <p:nvPr/>
-        </p:nvSpPr>
-        <p:spPr>
-          <a:xfrm>
             <a:off x="11094415" y="6446520"/>
             <a:ext cx="548640" cy="274320"/>
           </a:xfrm>
@@ -9110,41 +8655,6 @@
         </p:nvSpPr>
         <p:spPr>
           <a:xfrm>
-            <a:off x="2194560" y="6446520"/>
-            <a:ext cx="5943600" cy="274320"/>
-          </a:xfrm>
-          <a:prstGeom prst="rect">
-            <a:avLst/>
-          </a:prstGeom>
-          <a:noFill/>
-        </p:spPr>
-        <p:txBody>
-          <a:bodyPr wrap="square" anchor="t" lIns="0" rIns="0" tIns="0" bIns="0">
-            <a:spAutoFit/>
-          </a:bodyPr>
-          <a:lstStyle/>
-          <a:p>
-            <a:pPr algn="l"/>
-            <a:r>
-              <a:rPr sz="1000" b="1" i="0">
-                <a:solidFill>
-                  <a:srgbClr val="8F989D"/>
-                </a:solidFill>
-                <a:latin typeface="Calibri"/>
-              </a:rPr>
-              <a:t>Inicio 5:10 pm</a:t>
-            </a:r>
-          </a:p>
-        </p:txBody>
-      </p:sp>
-      <p:sp>
-        <p:nvSpPr>
-          <p:cNvPr id="6" name="TextBox 5"/>
-          <p:cNvSpPr txBox="1"/>
-          <p:nvPr/>
-        </p:nvSpPr>
-        <p:spPr>
-          <a:xfrm>
             <a:off x="11094415" y="6446520"/>
             <a:ext cx="548640" cy="274320"/>
           </a:xfrm>
@@ -9494,41 +9004,6 @@
         </p:nvSpPr>
         <p:spPr>
           <a:xfrm>
-            <a:off x="2194560" y="6446520"/>
-            <a:ext cx="5943600" cy="274320"/>
-          </a:xfrm>
-          <a:prstGeom prst="rect">
-            <a:avLst/>
-          </a:prstGeom>
-          <a:noFill/>
-        </p:spPr>
-        <p:txBody>
-          <a:bodyPr wrap="square" anchor="t" lIns="0" rIns="0" tIns="0" bIns="0">
-            <a:spAutoFit/>
-          </a:bodyPr>
-          <a:lstStyle/>
-          <a:p>
-            <a:pPr algn="l"/>
-            <a:r>
-              <a:rPr sz="1000" b="1" i="0">
-                <a:solidFill>
-                  <a:srgbClr val="8F989D"/>
-                </a:solidFill>
-                <a:latin typeface="Calibri"/>
-              </a:rPr>
-              <a:t>Inicio 5:10 pm</a:t>
-            </a:r>
-          </a:p>
-        </p:txBody>
-      </p:sp>
-      <p:sp>
-        <p:nvSpPr>
-          <p:cNvPr id="6" name="TextBox 5"/>
-          <p:cNvSpPr txBox="1"/>
-          <p:nvPr/>
-        </p:nvSpPr>
-        <p:spPr>
-          <a:xfrm>
             <a:off x="11094415" y="6446520"/>
             <a:ext cx="548640" cy="274320"/>
           </a:xfrm>
@@ -9558,7 +9033,7 @@
       </p:sp>
       <p:sp>
         <p:nvSpPr>
-          <p:cNvPr id="7" name="TextBox 6"/>
+          <p:cNvPr id="6" name="TextBox 5"/>
           <p:cNvSpPr txBox="1"/>
           <p:nvPr/>
         </p:nvSpPr>
@@ -9921,41 +9396,6 @@
       <p:sp>
         <p:nvSpPr>
           <p:cNvPr id="5" name="TextBox 4"/>
-          <p:cNvSpPr txBox="1"/>
-          <p:nvPr/>
-        </p:nvSpPr>
-        <p:spPr>
-          <a:xfrm>
-            <a:off x="2194560" y="6446520"/>
-            <a:ext cx="5943600" cy="274320"/>
-          </a:xfrm>
-          <a:prstGeom prst="rect">
-            <a:avLst/>
-          </a:prstGeom>
-          <a:noFill/>
-        </p:spPr>
-        <p:txBody>
-          <a:bodyPr wrap="square" anchor="t" lIns="0" rIns="0" tIns="0" bIns="0">
-            <a:spAutoFit/>
-          </a:bodyPr>
-          <a:lstStyle/>
-          <a:p>
-            <a:pPr algn="l"/>
-            <a:r>
-              <a:rPr sz="1000" b="1" i="0">
-                <a:solidFill>
-                  <a:srgbClr val="8F989D"/>
-                </a:solidFill>
-                <a:latin typeface="Calibri"/>
-              </a:rPr>
-              <a:t>Inicio 5:10 pm</a:t>
-            </a:r>
-          </a:p>
-        </p:txBody>
-      </p:sp>
-      <p:sp>
-        <p:nvSpPr>
-          <p:cNvPr id="6" name="TextBox 5"/>
           <p:cNvSpPr txBox="1"/>
           <p:nvPr/>
         </p:nvSpPr>
@@ -10588,41 +10028,6 @@
         </p:nvSpPr>
         <p:spPr>
           <a:xfrm>
-            <a:off x="2194560" y="6446520"/>
-            <a:ext cx="5943600" cy="274320"/>
-          </a:xfrm>
-          <a:prstGeom prst="rect">
-            <a:avLst/>
-          </a:prstGeom>
-          <a:noFill/>
-        </p:spPr>
-        <p:txBody>
-          <a:bodyPr wrap="square" anchor="t" lIns="0" rIns="0" tIns="0" bIns="0">
-            <a:spAutoFit/>
-          </a:bodyPr>
-          <a:lstStyle/>
-          <a:p>
-            <a:pPr algn="l"/>
-            <a:r>
-              <a:rPr sz="1000" b="1" i="0">
-                <a:solidFill>
-                  <a:srgbClr val="8F989D"/>
-                </a:solidFill>
-                <a:latin typeface="Calibri"/>
-              </a:rPr>
-              <a:t>Inicio 5:10 pm</a:t>
-            </a:r>
-          </a:p>
-        </p:txBody>
-      </p:sp>
-      <p:sp>
-        <p:nvSpPr>
-          <p:cNvPr id="7" name="TextBox 6"/>
-          <p:cNvSpPr txBox="1"/>
-          <p:nvPr/>
-        </p:nvSpPr>
-        <p:spPr>
-          <a:xfrm>
             <a:off x="11094415" y="6446520"/>
             <a:ext cx="548640" cy="274320"/>
           </a:xfrm>
@@ -10945,41 +10350,6 @@
       <p:sp>
         <p:nvSpPr>
           <p:cNvPr id="5" name="TextBox 4"/>
-          <p:cNvSpPr txBox="1"/>
-          <p:nvPr/>
-        </p:nvSpPr>
-        <p:spPr>
-          <a:xfrm>
-            <a:off x="2194560" y="6446520"/>
-            <a:ext cx="5943600" cy="274320"/>
-          </a:xfrm>
-          <a:prstGeom prst="rect">
-            <a:avLst/>
-          </a:prstGeom>
-          <a:noFill/>
-        </p:spPr>
-        <p:txBody>
-          <a:bodyPr wrap="square" anchor="t" lIns="0" rIns="0" tIns="0" bIns="0">
-            <a:spAutoFit/>
-          </a:bodyPr>
-          <a:lstStyle/>
-          <a:p>
-            <a:pPr algn="l"/>
-            <a:r>
-              <a:rPr sz="1000" b="1" i="0">
-                <a:solidFill>
-                  <a:srgbClr val="8F989D"/>
-                </a:solidFill>
-                <a:latin typeface="Calibri"/>
-              </a:rPr>
-              <a:t>Inicio 5:10 pm</a:t>
-            </a:r>
-          </a:p>
-        </p:txBody>
-      </p:sp>
-      <p:sp>
-        <p:nvSpPr>
-          <p:cNvPr id="6" name="TextBox 5"/>
           <p:cNvSpPr txBox="1"/>
           <p:nvPr/>
         </p:nvSpPr>

--- a/Pregrado/Trabajo de grado 2/Clases/Sesion 10 - Socialización de avances/Presentacion.pptx
+++ b/Pregrado/Trabajo de grado 2/Clases/Sesion 10 - Socialización de avances/Presentacion.pptx
@@ -23,6 +23,8 @@
     <p:sldId id="271" r:id="rId22"/>
     <p:sldId id="272" r:id="rId23"/>
     <p:sldId id="273" r:id="rId24"/>
+    <p:sldId id="274" r:id="rId25"/>
+    <p:sldId id="275" r:id="rId26"/>
   </p:sldIdLst>
   <p:sldSz cx="12191695" cy="6858000" type="screen4x3"/>
   <p:notesSz cx="6858000" cy="9144000"/>
@@ -5204,7 +5206,7 @@
                 </a:solidFill>
                 <a:latin typeface="Calibri"/>
               </a:rPr>
-              <a:t> — [URL CDigital — campus del curso pendiente].</a:t>
+              <a:t> — https://cdigital.cun.edu.co/course/view.php?id=129268.</a:t>
             </a:r>
           </a:p>
         </p:txBody>
@@ -5725,7 +5727,7 @@
                 </a:solidFill>
                 <a:latin typeface="Calibri"/>
               </a:rPr>
-              <a:t>TALLER — Pitch de 3 minutos y ronda de retroalimentación</a:t>
+              <a:t>TALLER · Pitch de 3 minutos y ronda de retroalimentación</a:t>
             </a:r>
           </a:p>
         </p:txBody>
@@ -5738,8 +5740,8 @@
         </p:nvSpPr>
         <p:spPr>
           <a:xfrm>
-            <a:off x="640080" y="1691639"/>
-            <a:ext cx="10911535" cy="4617720"/>
+            <a:off x="640080" y="1280160"/>
+            <a:ext cx="10911535" cy="411480"/>
           </a:xfrm>
           <a:prstGeom prst="rect">
             <a:avLst/>
@@ -5752,6 +5754,41 @@
           </a:bodyPr>
           <a:lstStyle/>
           <a:p>
+            <a:pPr algn="ctr"/>
+            <a:r>
+              <a:rPr sz="1500" b="0" i="0">
+                <a:solidFill>
+                  <a:srgbClr val="2B2B2B"/>
+                </a:solidFill>
+                <a:latin typeface="Calibri"/>
+              </a:rPr>
+              <a:t>En ronda, moderada por el Docente, con cronómetro a la vista</a:t>
+            </a:r>
+          </a:p>
+        </p:txBody>
+      </p:sp>
+      <p:sp>
+        <p:nvSpPr>
+          <p:cNvPr id="5" name="TextBox 4"/>
+          <p:cNvSpPr txBox="1"/>
+          <p:nvPr/>
+        </p:nvSpPr>
+        <p:spPr>
+          <a:xfrm>
+            <a:off x="640080" y="2011679"/>
+            <a:ext cx="10911535" cy="4297680"/>
+          </a:xfrm>
+          <a:prstGeom prst="rect">
+            <a:avLst/>
+          </a:prstGeom>
+          <a:noFill/>
+        </p:spPr>
+        <p:txBody>
+          <a:bodyPr wrap="square" anchor="t" lIns="0" rIns="0" tIns="0" bIns="0">
+            <a:spAutoFit/>
+          </a:bodyPr>
+          <a:lstStyle/>
+          <a:p>
             <a:pPr>
               <a:spcAft>
                 <a:spcPts val="1000"/>
@@ -5773,7 +5810,7 @@
                 </a:solidFill>
                 <a:latin typeface="Calibri"/>
               </a:rPr>
-              <a:t>Tiempo:</a:t>
+              <a:t>Al final tiene:</a:t>
             </a:r>
             <a:r>
               <a:rPr sz="1600" b="0" i="0">
@@ -5782,7 +5819,7 @@
                 </a:solidFill>
                 <a:latin typeface="Calibri"/>
               </a:rPr>
-              <a:t> 20 minutos en ronda, moderada por el Docente.</a:t>
+              <a:t> su guion de pitch y las notas de dos pares, con qué incorpora y qué no.</a:t>
             </a:r>
           </a:p>
           <a:p>
@@ -5807,7 +5844,7 @@
                 </a:solidFill>
                 <a:latin typeface="Calibri"/>
               </a:rPr>
-              <a:t>Archivo:</a:t>
+              <a:t>Paso 1</a:t>
             </a:r>
             <a:r>
               <a:rPr sz="1600" b="0" i="0">
@@ -5816,7 +5853,25 @@
                 </a:solidFill>
                 <a:latin typeface="Calibri"/>
               </a:rPr>
-              <a:t> un documento en Google Docs llamado S10_Socializacion_Apellido.</a:t>
+              <a:t> · Presente su </a:t>
+            </a:r>
+            <a:r>
+              <a:rPr sz="1600" b="1" i="0">
+                <a:solidFill>
+                  <a:srgbClr val="2B2B2B"/>
+                </a:solidFill>
+                <a:latin typeface="Calibri"/>
+              </a:rPr>
+              <a:t>pitch de 3 minutos</a:t>
+            </a:r>
+            <a:r>
+              <a:rPr sz="1600" b="0" i="0">
+                <a:solidFill>
+                  <a:srgbClr val="2B2B2B"/>
+                </a:solidFill>
+                <a:latin typeface="Calibri"/>
+              </a:rPr>
+              <a:t> con la estructura problema → pregunta y objetivos → avance → pedido.</a:t>
             </a:r>
           </a:p>
           <a:p>
@@ -5841,7 +5896,7 @@
                 </a:solidFill>
                 <a:latin typeface="Calibri"/>
               </a:rPr>
-              <a:t>Consigna 1.</a:t>
+              <a:t>Paso 2</a:t>
             </a:r>
             <a:r>
               <a:rPr sz="1600" b="0" i="0">
@@ -5850,7 +5905,7 @@
                 </a:solidFill>
                 <a:latin typeface="Calibri"/>
               </a:rPr>
-              <a:t> Presente su </a:t>
+              <a:t> · Dé retroalimentación a </a:t>
             </a:r>
             <a:r>
               <a:rPr sz="1600" b="1" i="0">
@@ -5859,7 +5914,7 @@
                 </a:solidFill>
                 <a:latin typeface="Calibri"/>
               </a:rPr>
-              <a:t>pitch de 3 minutos</a:t>
+              <a:t>al menos dos compañeros</a:t>
             </a:r>
             <a:r>
               <a:rPr sz="1600" b="0" i="0">
@@ -5868,7 +5923,7 @@
                 </a:solidFill>
                 <a:latin typeface="Calibri"/>
               </a:rPr>
-              <a:t> con la estructura problema → pregunta y objetivos → avance → pedido, con cronómetro a la vista.</a:t>
+              <a:t> con la fórmula fortaleza + pregunta + sugerencia.</a:t>
             </a:r>
           </a:p>
           <a:p>
@@ -5893,7 +5948,7 @@
                 </a:solidFill>
                 <a:latin typeface="Calibri"/>
               </a:rPr>
-              <a:t>Consigna 2.</a:t>
+              <a:t>Paso 3</a:t>
             </a:r>
             <a:r>
               <a:rPr sz="1600" b="0" i="0">
@@ -5902,7 +5957,7 @@
                 </a:solidFill>
                 <a:latin typeface="Calibri"/>
               </a:rPr>
-              <a:t> Dé retroalimentación a </a:t>
+              <a:t> · Registre en su documento el feedback que reciba, </a:t>
             </a:r>
             <a:r>
               <a:rPr sz="1600" b="1" i="0">
@@ -5911,7 +5966,7 @@
                 </a:solidFill>
                 <a:latin typeface="Calibri"/>
               </a:rPr>
-              <a:t>al menos dos compañeros</a:t>
+              <a:t>textual</a:t>
             </a:r>
             <a:r>
               <a:rPr sz="1600" b="0" i="0">
@@ -5920,7 +5975,25 @@
                 </a:solidFill>
                 <a:latin typeface="Calibri"/>
               </a:rPr>
-              <a:t> con la fórmula fortaleza + pregunta + sugerencia.</a:t>
+              <a:t>, y marque cuál va a incorporar y cuál no, </a:t>
+            </a:r>
+            <a:r>
+              <a:rPr sz="1600" b="1" i="0">
+                <a:solidFill>
+                  <a:srgbClr val="2B2B2B"/>
+                </a:solidFill>
+                <a:latin typeface="Calibri"/>
+              </a:rPr>
+              <a:t>con una razón</a:t>
+            </a:r>
+            <a:r>
+              <a:rPr sz="1600" b="0" i="0">
+                <a:solidFill>
+                  <a:srgbClr val="2B2B2B"/>
+                </a:solidFill>
+                <a:latin typeface="Calibri"/>
+              </a:rPr>
+              <a:t>.</a:t>
             </a:r>
           </a:p>
           <a:p>
@@ -5945,7 +6018,7 @@
                 </a:solidFill>
                 <a:latin typeface="Calibri"/>
               </a:rPr>
-              <a:t>Consigna 3.</a:t>
+              <a:t>En clase, sin falta:</a:t>
             </a:r>
             <a:r>
               <a:rPr sz="1600" b="0" i="0">
@@ -5954,15 +6027,17 @@
                 </a:solidFill>
                 <a:latin typeface="Calibri"/>
               </a:rPr>
-              <a:t> Registre en su documento el feedback que reciba, textual, y marque cuál va a incorporar y cuál no, con una razón.</a:t>
-            </a:r>
-          </a:p>
-          <a:p>
-            <a:pPr>
-              <a:spcAft>
-                <a:spcPts val="1000"/>
-              </a:spcAft>
-            </a:pPr>
+              <a:t> los </a:t>
+            </a:r>
+            <a:r>
+              <a:rPr sz="1600" b="1" i="0">
+                <a:solidFill>
+                  <a:srgbClr val="2B2B2B"/>
+                </a:solidFill>
+                <a:latin typeface="Calibri"/>
+              </a:rPr>
+              <a:t>pasos 1 a 2</a:t>
+            </a:r>
             <a:r>
               <a:rPr sz="1600" b="0" i="0">
                 <a:solidFill>
@@ -5970,84 +6045,14 @@
                 </a:solidFill>
                 <a:latin typeface="Calibri"/>
               </a:rPr>
-              <a:t>–   </a:t>
-            </a:r>
-            <a:r>
-              <a:rPr sz="1600" b="1" i="0">
-                <a:solidFill>
-                  <a:srgbClr val="2B2B2B"/>
-                </a:solidFill>
-                <a:latin typeface="Calibri"/>
-              </a:rPr>
-              <a:t>Criterio de éxito (verificable):</a:t>
-            </a:r>
-            <a:r>
-              <a:rPr sz="1600" b="0" i="0">
-                <a:solidFill>
-                  <a:srgbClr val="2B2B2B"/>
-                </a:solidFill>
-                <a:latin typeface="Calibri"/>
-              </a:rPr>
-              <a:t> el pitch cierra dentro de los 3 minutos; su documento tiene el guion de cuatro frases y notas de dos pares; ninguna nota dice solo 'está bien'.</a:t>
-            </a:r>
-          </a:p>
-          <a:p>
-            <a:pPr>
-              <a:spcAft>
-                <a:spcPts val="1000"/>
-              </a:spcAft>
-            </a:pPr>
-            <a:r>
-              <a:rPr sz="1600" b="0" i="0">
-                <a:solidFill>
-                  <a:srgbClr val="2B2B2B"/>
-                </a:solidFill>
-                <a:latin typeface="Calibri"/>
-              </a:rPr>
-              <a:t>–   </a:t>
-            </a:r>
-            <a:r>
-              <a:rPr sz="1600" b="1" i="0">
-                <a:solidFill>
-                  <a:srgbClr val="2B2B2B"/>
-                </a:solidFill>
-                <a:latin typeface="Calibri"/>
-              </a:rPr>
-              <a:t>Entrega:</a:t>
-            </a:r>
-            <a:r>
-              <a:rPr sz="1600" b="0" i="0">
-                <a:solidFill>
-                  <a:srgbClr val="2B2B2B"/>
-                </a:solidFill>
-                <a:latin typeface="Calibri"/>
-              </a:rPr>
-              <a:t> suba S10_Socializacion_Apellido a </a:t>
-            </a:r>
-            <a:r>
-              <a:rPr sz="1600" b="1" i="0">
-                <a:solidFill>
-                  <a:srgbClr val="2B2B2B"/>
-                </a:solidFill>
-                <a:latin typeface="Calibri"/>
-              </a:rPr>
-              <a:t>CDigital</a:t>
-            </a:r>
-            <a:r>
-              <a:rPr sz="1600" b="0" i="0">
-                <a:solidFill>
-                  <a:srgbClr val="2B2B2B"/>
-                </a:solidFill>
-                <a:latin typeface="Calibri"/>
-              </a:rPr>
-              <a:t> — [URL CDigital — campus del curso pendiente].</a:t>
-            </a:r>
-          </a:p>
-        </p:txBody>
-      </p:sp>
-      <p:sp>
-        <p:nvSpPr>
-          <p:cNvPr id="5" name="TextBox 4"/>
+              <a:t>. Del 3 en adelante puede quedar en trabajo autónomo, pero antes de la próxima sesión.</a:t>
+            </a:r>
+          </a:p>
+        </p:txBody>
+      </p:sp>
+      <p:sp>
+        <p:nvSpPr>
+          <p:cNvPr id="6" name="TextBox 5"/>
           <p:cNvSpPr txBox="1"/>
           <p:nvPr/>
         </p:nvSpPr>
@@ -6180,7 +6185,7 @@
                 </a:solidFill>
                 <a:latin typeface="Calibri"/>
               </a:rPr>
-              <a:t>Checklist de autoevaluación antes de entregar</a:t>
+              <a:t>TALLER · cómo se revisa y dónde se entrega</a:t>
             </a:r>
           </a:p>
         </p:txBody>
@@ -6193,8 +6198,8 @@
         </p:nvSpPr>
         <p:spPr>
           <a:xfrm>
-            <a:off x="640080" y="1691639"/>
-            <a:ext cx="10911535" cy="4617720"/>
+            <a:off x="640080" y="1280160"/>
+            <a:ext cx="10911535" cy="411480"/>
           </a:xfrm>
           <a:prstGeom prst="rect">
             <a:avLst/>
@@ -6207,6 +6212,41 @@
           </a:bodyPr>
           <a:lstStyle/>
           <a:p>
+            <a:pPr algn="ctr"/>
+            <a:r>
+              <a:rPr sz="1500" b="0" i="0">
+                <a:solidFill>
+                  <a:srgbClr val="2B2B2B"/>
+                </a:solidFill>
+                <a:latin typeface="Calibri"/>
+              </a:rPr>
+              <a:t>Pitch de 3 minutos y ronda de retroalimentación</a:t>
+            </a:r>
+          </a:p>
+        </p:txBody>
+      </p:sp>
+      <p:sp>
+        <p:nvSpPr>
+          <p:cNvPr id="5" name="TextBox 4"/>
+          <p:cNvSpPr txBox="1"/>
+          <p:nvPr/>
+        </p:nvSpPr>
+        <p:spPr>
+          <a:xfrm>
+            <a:off x="640080" y="2011679"/>
+            <a:ext cx="10911535" cy="4297680"/>
+          </a:xfrm>
+          <a:prstGeom prst="rect">
+            <a:avLst/>
+          </a:prstGeom>
+          <a:noFill/>
+        </p:spPr>
+        <p:txBody>
+          <a:bodyPr wrap="square" anchor="t" lIns="0" rIns="0" tIns="0" bIns="0">
+            <a:spAutoFit/>
+          </a:bodyPr>
+          <a:lstStyle/>
+          <a:p>
             <a:pPr>
               <a:spcAft>
                 <a:spcPts val="1000"/>
@@ -6219,7 +6259,136 @@
                 </a:solidFill>
                 <a:latin typeface="Calibri"/>
               </a:rPr>
-              <a:t>–   ¿Mi guion cabe en cuatro frases, una por bloque, y no en cuatro párrafos?</a:t>
+              <a:t>–   </a:t>
+            </a:r>
+            <a:r>
+              <a:rPr sz="1600" b="1" i="0">
+                <a:solidFill>
+                  <a:srgbClr val="2B2B2B"/>
+                </a:solidFill>
+                <a:latin typeface="Calibri"/>
+              </a:rPr>
+              <a:t>Quedó bien si</a:t>
+            </a:r>
+            <a:r>
+              <a:rPr sz="1600" b="0" i="0">
+                <a:solidFill>
+                  <a:srgbClr val="2B2B2B"/>
+                </a:solidFill>
+                <a:latin typeface="Calibri"/>
+              </a:rPr>
+              <a:t> —compruébelo usted antes de cerrar el documento—:</a:t>
+            </a:r>
+          </a:p>
+          <a:p>
+            <a:pPr lvl="1">
+              <a:spcAft>
+                <a:spcPts val="600"/>
+              </a:spcAft>
+            </a:pPr>
+            <a:r>
+              <a:rPr sz="1500" b="0" i="0">
+                <a:solidFill>
+                  <a:srgbClr val="2B2B2B"/>
+                </a:solidFill>
+                <a:latin typeface="Calibri"/>
+              </a:rPr>
+              <a:t>●   El pitch </a:t>
+            </a:r>
+            <a:r>
+              <a:rPr sz="1500" b="1" i="0">
+                <a:solidFill>
+                  <a:srgbClr val="2B2B2B"/>
+                </a:solidFill>
+                <a:latin typeface="Calibri"/>
+              </a:rPr>
+              <a:t>cierra dentro de los 3 minutos</a:t>
+            </a:r>
+            <a:r>
+              <a:rPr sz="1500" b="0" i="0">
+                <a:solidFill>
+                  <a:srgbClr val="2B2B2B"/>
+                </a:solidFill>
+                <a:latin typeface="Calibri"/>
+              </a:rPr>
+              <a:t>.</a:t>
+            </a:r>
+          </a:p>
+          <a:p>
+            <a:pPr lvl="1">
+              <a:spcAft>
+                <a:spcPts val="600"/>
+              </a:spcAft>
+            </a:pPr>
+            <a:r>
+              <a:rPr sz="1500" b="0" i="0">
+                <a:solidFill>
+                  <a:srgbClr val="2B2B2B"/>
+                </a:solidFill>
+                <a:latin typeface="Calibri"/>
+              </a:rPr>
+              <a:t>●   Su documento tiene el </a:t>
+            </a:r>
+            <a:r>
+              <a:rPr sz="1500" b="1" i="0">
+                <a:solidFill>
+                  <a:srgbClr val="2B2B2B"/>
+                </a:solidFill>
+                <a:latin typeface="Calibri"/>
+              </a:rPr>
+              <a:t>guion de cuatro frases</a:t>
+            </a:r>
+            <a:r>
+              <a:rPr sz="1500" b="0" i="0">
+                <a:solidFill>
+                  <a:srgbClr val="2B2B2B"/>
+                </a:solidFill>
+                <a:latin typeface="Calibri"/>
+              </a:rPr>
+              <a:t> y </a:t>
+            </a:r>
+            <a:r>
+              <a:rPr sz="1500" b="1" i="0">
+                <a:solidFill>
+                  <a:srgbClr val="2B2B2B"/>
+                </a:solidFill>
+                <a:latin typeface="Calibri"/>
+              </a:rPr>
+              <a:t>notas de dos pares</a:t>
+            </a:r>
+            <a:r>
+              <a:rPr sz="1500" b="0" i="0">
+                <a:solidFill>
+                  <a:srgbClr val="2B2B2B"/>
+                </a:solidFill>
+                <a:latin typeface="Calibri"/>
+              </a:rPr>
+              <a:t>.</a:t>
+            </a:r>
+          </a:p>
+          <a:p>
+            <a:pPr lvl="1">
+              <a:spcAft>
+                <a:spcPts val="600"/>
+              </a:spcAft>
+            </a:pPr>
+            <a:r>
+              <a:rPr sz="1500" b="0" i="0">
+                <a:solidFill>
+                  <a:srgbClr val="2B2B2B"/>
+                </a:solidFill>
+                <a:latin typeface="Calibri"/>
+              </a:rPr>
+              <a:t>●   </a:t>
+            </a:r>
+            <a:r>
+              <a:rPr sz="1500" b="1" i="0">
+                <a:solidFill>
+                  <a:srgbClr val="2B2B2B"/>
+                </a:solidFill>
+                <a:latin typeface="Calibri"/>
+              </a:rPr>
+              <a:t>Ninguna nota dice solo «está bien».</a:t>
             </a:r>
           </a:p>
           <a:p>
@@ -6235,7 +6404,25 @@
                 </a:solidFill>
                 <a:latin typeface="Calibri"/>
               </a:rPr>
-              <a:t>–   ¿Dije mi pregunta literal, sin parafrasearla ni suavizarla?</a:t>
+              <a:t>–   </a:t>
+            </a:r>
+            <a:r>
+              <a:rPr sz="1600" b="1" i="0">
+                <a:solidFill>
+                  <a:srgbClr val="2B2B2B"/>
+                </a:solidFill>
+                <a:latin typeface="Calibri"/>
+              </a:rPr>
+              <a:t>Plan B:</a:t>
+            </a:r>
+            <a:r>
+              <a:rPr sz="1600" b="0" i="0">
+                <a:solidFill>
+                  <a:srgbClr val="2B2B2B"/>
+                </a:solidFill>
+                <a:latin typeface="Calibri"/>
+              </a:rPr>
+              <a:t> Si se pasa de los 3 minutos, recorte el bloque de avance: el pedido nunca se recorta, porque es lo único que le devuelve algo.</a:t>
             </a:r>
           </a:p>
           <a:p>
@@ -6251,7 +6438,43 @@
                 </a:solidFill>
                 <a:latin typeface="Calibri"/>
               </a:rPr>
-              <a:t>–   ¿Mi pedido de feedback señala un punto exacto y no un 'acepto sugerencias'?</a:t>
+              <a:t>–   </a:t>
+            </a:r>
+            <a:r>
+              <a:rPr sz="1600" b="1" i="0">
+                <a:solidFill>
+                  <a:srgbClr val="2B2B2B"/>
+                </a:solidFill>
+                <a:latin typeface="Calibri"/>
+              </a:rPr>
+              <a:t>Hoy no se sube nada al aula:</a:t>
+            </a:r>
+            <a:r>
+              <a:rPr sz="1600" b="0" i="0">
+                <a:solidFill>
+                  <a:srgbClr val="2B2B2B"/>
+                </a:solidFill>
+                <a:latin typeface="Calibri"/>
+              </a:rPr>
+              <a:t> guarde `S10_Socializacion_Apellido` (Google Doc o PDF) en su Drive y tráigalo a la próxima sesión. Es un </a:t>
+            </a:r>
+            <a:r>
+              <a:rPr sz="1600" b="1" i="0">
+                <a:solidFill>
+                  <a:srgbClr val="2B2B2B"/>
+                </a:solidFill>
+                <a:latin typeface="Calibri"/>
+              </a:rPr>
+              <a:t>avance formativo</a:t>
+            </a:r>
+            <a:r>
+              <a:rPr sz="1600" b="0" i="0">
+                <a:solidFill>
+                  <a:srgbClr val="2B2B2B"/>
+                </a:solidFill>
+                <a:latin typeface="Calibri"/>
+              </a:rPr>
+              <a:t>, se revisa en clase.</a:t>
             </a:r>
           </a:p>
           <a:p>
@@ -6267,15 +6490,17 @@
                 </a:solidFill>
                 <a:latin typeface="Calibri"/>
               </a:rPr>
-              <a:t>–   ¿Presenté dentro de los tres minutos sin que me tuvieran que cortar?</a:t>
-            </a:r>
-          </a:p>
-          <a:p>
-            <a:pPr>
-              <a:spcAft>
-                <a:spcPts val="1000"/>
-              </a:spcAft>
-            </a:pPr>
+              <a:t>–   </a:t>
+            </a:r>
+            <a:r>
+              <a:rPr sz="1600" b="1" i="0">
+                <a:solidFill>
+                  <a:srgbClr val="2B2B2B"/>
+                </a:solidFill>
+                <a:latin typeface="Calibri"/>
+              </a:rPr>
+              <a:t>Esto alimenta:</a:t>
+            </a:r>
             <a:r>
               <a:rPr sz="1600" b="0" i="0">
                 <a:solidFill>
@@ -6283,15 +6508,17 @@
                 </a:solidFill>
                 <a:latin typeface="Calibri"/>
               </a:rPr>
-              <a:t>–   ¿Di feedback a dos compañeros con fortaleza, pregunta y sugerencia concretas?</a:t>
-            </a:r>
-          </a:p>
-          <a:p>
-            <a:pPr>
-              <a:spcAft>
-                <a:spcPts val="1000"/>
-              </a:spcAft>
-            </a:pPr>
+              <a:t> </a:t>
+            </a:r>
+            <a:r>
+              <a:rPr sz="1600" b="1" i="0">
+                <a:solidFill>
+                  <a:srgbClr val="2B2B2B"/>
+                </a:solidFill>
+                <a:latin typeface="Calibri"/>
+              </a:rPr>
+              <a:t>ACA Final</a:t>
+            </a:r>
             <a:r>
               <a:rPr sz="1600" b="0" i="0">
                 <a:solidFill>
@@ -6299,15 +6526,17 @@
                 </a:solidFill>
                 <a:latin typeface="Calibri"/>
               </a:rPr>
-              <a:t>–   ¿Anoté todos los comentarios textuales, sin discutir en el momento?</a:t>
-            </a:r>
-          </a:p>
-          <a:p>
-            <a:pPr>
-              <a:spcAft>
-                <a:spcPts val="1000"/>
-              </a:spcAft>
-            </a:pPr>
+              <a:t> —tarea, 32,8%—, el documento que </a:t>
+            </a:r>
+            <a:r>
+              <a:rPr sz="1600" b="1" i="0">
+                <a:solidFill>
+                  <a:srgbClr val="2B2B2B"/>
+                </a:solidFill>
+                <a:latin typeface="Calibri"/>
+              </a:rPr>
+              <a:t>sí</a:t>
+            </a:r>
             <a:r>
               <a:rPr sz="1600" b="0" i="0">
                 <a:solidFill>
@@ -6315,15 +6544,17 @@
                 </a:solidFill>
                 <a:latin typeface="Calibri"/>
               </a:rPr>
-              <a:t>–   ¿Marqué cuáles comentarios incorporo, cuáles no, y por qué?</a:t>
-            </a:r>
-          </a:p>
-          <a:p>
-            <a:pPr>
-              <a:spcAft>
-                <a:spcPts val="1000"/>
-              </a:spcAft>
-            </a:pPr>
+              <a:t> recibe </a:t>
+            </a:r>
+            <a:r>
+              <a:rPr sz="1600" b="1" i="0">
+                <a:solidFill>
+                  <a:srgbClr val="2B2B2B"/>
+                </a:solidFill>
+                <a:latin typeface="Calibri"/>
+              </a:rPr>
+              <a:t>CDigital</a:t>
+            </a:r>
             <a:r>
               <a:rPr sz="1600" b="0" i="0">
                 <a:solidFill>
@@ -6331,14 +6562,32 @@
                 </a:solidFill>
                 <a:latin typeface="Calibri"/>
               </a:rPr>
-              <a:t>–   ¿Subí el archivo a CDigital con el guion y las notas recibidas?</a:t>
-            </a:r>
-          </a:p>
-        </p:txBody>
-      </p:sp>
-      <p:sp>
-        <p:nvSpPr>
-          <p:cNvPr id="5" name="TextBox 4"/>
+              <a:t>; cierra en la semana de la </a:t>
+            </a:r>
+            <a:r>
+              <a:rPr sz="1600" b="1" i="0">
+                <a:solidFill>
+                  <a:srgbClr val="2B2B2B"/>
+                </a:solidFill>
+                <a:latin typeface="Calibri"/>
+              </a:rPr>
+              <a:t>Sesión 11</a:t>
+            </a:r>
+            <a:r>
+              <a:rPr sz="1600" b="0" i="0">
+                <a:solidFill>
+                  <a:srgbClr val="2B2B2B"/>
+                </a:solidFill>
+                <a:latin typeface="Calibri"/>
+              </a:rPr>
+              <a:t>.</a:t>
+            </a:r>
+          </a:p>
+        </p:txBody>
+      </p:sp>
+      <p:sp>
+        <p:nvSpPr>
+          <p:cNvPr id="6" name="TextBox 5"/>
           <p:cNvSpPr txBox="1"/>
           <p:nvPr/>
         </p:nvSpPr>
@@ -6471,7 +6720,7 @@
                 </a:solidFill>
                 <a:latin typeface="Calibri"/>
               </a:rPr>
-              <a:t>Para continuar (trabajo autónomo)</a:t>
+              <a:t>Checklist de autoevaluación antes de entregar</a:t>
             </a:r>
           </a:p>
         </p:txBody>
@@ -6510,7 +6759,7 @@
                 </a:solidFill>
                 <a:latin typeface="Calibri"/>
               </a:rPr>
-              <a:t>–   Suba S10_Socializacion_Apellido con el guion de pitch y las notas de retroalimentación recibidas.</a:t>
+              <a:t>–   ¿Mi guion cabe en cuatro frases, una por bloque, y no en cuatro párrafos?</a:t>
             </a:r>
           </a:p>
           <a:p>
@@ -6526,7 +6775,7 @@
                 </a:solidFill>
                 <a:latin typeface="Calibri"/>
               </a:rPr>
-              <a:t>–   Incorpore al documento las sugerencias que decidió tomar; deje registrada en una línea la razón de las que descartó.</a:t>
+              <a:t>–   ¿Dije mi pregunta literal, sin parafrasearla ni suavizarla?</a:t>
             </a:r>
           </a:p>
           <a:p>
@@ -6542,7 +6791,7 @@
                 </a:solidFill>
                 <a:latin typeface="Calibri"/>
               </a:rPr>
-              <a:t>–   Grábese dando el pitch con el celular y véase una vez: la mayoría descubre que habla demasiado rápido al comienzo.</a:t>
+              <a:t>–   ¿Mi pedido de feedback señala un punto exacto y no un 'acepto sugerencias'?</a:t>
             </a:r>
           </a:p>
           <a:p>
@@ -6558,7 +6807,7 @@
                 </a:solidFill>
                 <a:latin typeface="Calibri"/>
               </a:rPr>
-              <a:t>–   Guarde el guion: es la base directa de la sustentación de TG3, solo que allá tendrá resultados que contar.</a:t>
+              <a:t>–   ¿Presenté dentro de los tres minutos sin que me tuvieran que cortar?</a:t>
             </a:r>
           </a:p>
           <a:p>
@@ -6574,41 +6823,55 @@
                 </a:solidFill>
                 <a:latin typeface="Calibri"/>
               </a:rPr>
-              <a:t>–   </a:t>
-            </a:r>
-            <a:r>
-              <a:rPr sz="1600" b="1" i="0">
-                <a:solidFill>
-                  <a:srgbClr val="2B2B2B"/>
-                </a:solidFill>
-                <a:latin typeface="Calibri"/>
-              </a:rPr>
-              <a:t>Próxima sesión, la última sincrónica:</a:t>
-            </a:r>
-            <a:r>
-              <a:rPr sz="1600" b="0" i="0">
-                <a:solidFill>
-                  <a:srgbClr val="2B2B2B"/>
-                </a:solidFill>
-                <a:latin typeface="Calibri"/>
-              </a:rPr>
-              <a:t> cerramos el avance de TG2 y armamos el puente hacia TG3.</a:t>
-            </a:r>
-          </a:p>
-          <a:p>
-            <a:pPr lvl="1">
+              <a:t>–   ¿Di feedback a dos compañeros con fortaleza, pregunta y sugerencia concretas?</a:t>
+            </a:r>
+          </a:p>
+          <a:p>
+            <a:pPr>
               <a:spcAft>
-                <a:spcPts val="600"/>
+                <a:spcPts val="1000"/>
               </a:spcAft>
             </a:pPr>
             <a:r>
-              <a:rPr sz="1500" b="0" i="0">
-                <a:solidFill>
-                  <a:srgbClr val="2B2B2B"/>
-                </a:solidFill>
-                <a:latin typeface="Calibri"/>
-              </a:rPr>
-              <a:t>●   Llegue con el documento consolidado y con la lista de lo que le quedó a medias: eso se convierte en su plan del próximo semestre.</a:t>
+              <a:rPr sz="1600" b="0" i="0">
+                <a:solidFill>
+                  <a:srgbClr val="2B2B2B"/>
+                </a:solidFill>
+                <a:latin typeface="Calibri"/>
+              </a:rPr>
+              <a:t>–   ¿Anoté todos los comentarios textuales, sin discutir en el momento?</a:t>
+            </a:r>
+          </a:p>
+          <a:p>
+            <a:pPr>
+              <a:spcAft>
+                <a:spcPts val="1000"/>
+              </a:spcAft>
+            </a:pPr>
+            <a:r>
+              <a:rPr sz="1600" b="0" i="0">
+                <a:solidFill>
+                  <a:srgbClr val="2B2B2B"/>
+                </a:solidFill>
+                <a:latin typeface="Calibri"/>
+              </a:rPr>
+              <a:t>–   ¿Marqué cuáles comentarios incorporo, cuáles no, y por qué?</a:t>
+            </a:r>
+          </a:p>
+          <a:p>
+            <a:pPr>
+              <a:spcAft>
+                <a:spcPts val="1000"/>
+              </a:spcAft>
+            </a:pPr>
+            <a:r>
+              <a:rPr sz="1600" b="0" i="0">
+                <a:solidFill>
+                  <a:srgbClr val="2B2B2B"/>
+                </a:solidFill>
+                <a:latin typeface="Calibri"/>
+              </a:rPr>
+              <a:t>–   ¿Subí el archivo a CDigital con el guion y las notas recibidas?</a:t>
             </a:r>
           </a:p>
         </p:txBody>
@@ -6657,6 +6920,1854 @@
 </file>
 
 <file path=ppt/slides/slide18.xml><?xml version="1.0" encoding="utf-8"?>
+<p:sld xmlns:a="http://schemas.openxmlformats.org/drawingml/2006/main" xmlns:p="http://schemas.openxmlformats.org/presentationml/2006/main" xmlns:r="http://schemas.openxmlformats.org/officeDocument/2006/relationships">
+  <p:cSld>
+    <p:bg>
+      <p:bgPr>
+        <a:solidFill>
+          <a:srgbClr val="FFFFFF"/>
+        </a:solidFill>
+        <a:effectLst/>
+      </p:bgPr>
+    </p:bg>
+    <p:spTree>
+      <p:nvGrpSpPr>
+        <p:cNvPr id="1" name=""/>
+        <p:cNvGrpSpPr/>
+        <p:nvPr/>
+      </p:nvGrpSpPr>
+      <p:grpSpPr/>
+      <p:sp>
+        <p:nvSpPr>
+          <p:cNvPr id="2" name="Rectangle 1"/>
+          <p:cNvSpPr/>
+          <p:nvPr/>
+        </p:nvSpPr>
+        <p:spPr>
+          <a:xfrm>
+            <a:off x="0" y="0"/>
+            <a:ext cx="12191695" cy="1188720"/>
+          </a:xfrm>
+          <a:prstGeom prst="rect">
+            <a:avLst/>
+          </a:prstGeom>
+          <a:solidFill>
+            <a:srgbClr val="0C2340"/>
+          </a:solidFill>
+          <a:ln>
+            <a:noFill/>
+          </a:ln>
+          <a:effectLst/>
+        </p:spPr>
+        <p:style>
+          <a:lnRef idx="1">
+            <a:schemeClr val="accent1"/>
+          </a:lnRef>
+          <a:fillRef idx="3">
+            <a:schemeClr val="accent1"/>
+          </a:fillRef>
+          <a:effectRef idx="2">
+            <a:schemeClr val="accent1"/>
+          </a:effectRef>
+          <a:fontRef idx="minor">
+            <a:schemeClr val="lt1"/>
+          </a:fontRef>
+        </p:style>
+        <p:txBody>
+          <a:bodyPr rtlCol="0" anchor="ctr"/>
+          <a:lstStyle/>
+          <a:p>
+            <a:pPr algn="ctr"/>
+          </a:p>
+        </p:txBody>
+      </p:sp>
+      <p:sp>
+        <p:nvSpPr>
+          <p:cNvPr id="3" name="TextBox 2"/>
+          <p:cNvSpPr txBox="1"/>
+          <p:nvPr/>
+        </p:nvSpPr>
+        <p:spPr>
+          <a:xfrm>
+            <a:off x="640080" y="0"/>
+            <a:ext cx="9082735" cy="1188720"/>
+          </a:xfrm>
+          <a:prstGeom prst="rect">
+            <a:avLst/>
+          </a:prstGeom>
+          <a:noFill/>
+        </p:spPr>
+        <p:txBody>
+          <a:bodyPr wrap="square" anchor="ctr" lIns="0" rIns="0" tIns="0" bIns="0">
+            <a:spAutoFit/>
+          </a:bodyPr>
+          <a:lstStyle/>
+          <a:p>
+            <a:pPr algn="ctr"/>
+            <a:r>
+              <a:rPr sz="2600" b="1" i="0">
+                <a:solidFill>
+                  <a:srgbClr val="FFFFFF"/>
+                </a:solidFill>
+                <a:latin typeface="Calibri"/>
+              </a:rPr>
+              <a:t>Para continuar (trabajo autónomo)</a:t>
+            </a:r>
+          </a:p>
+        </p:txBody>
+      </p:sp>
+      <p:sp>
+        <p:nvSpPr>
+          <p:cNvPr id="4" name="TextBox 3"/>
+          <p:cNvSpPr txBox="1"/>
+          <p:nvPr/>
+        </p:nvSpPr>
+        <p:spPr>
+          <a:xfrm>
+            <a:off x="640080" y="1691639"/>
+            <a:ext cx="10911535" cy="4617720"/>
+          </a:xfrm>
+          <a:prstGeom prst="rect">
+            <a:avLst/>
+          </a:prstGeom>
+          <a:noFill/>
+        </p:spPr>
+        <p:txBody>
+          <a:bodyPr wrap="square" anchor="t" lIns="0" rIns="0" tIns="0" bIns="0">
+            <a:spAutoFit/>
+          </a:bodyPr>
+          <a:lstStyle/>
+          <a:p>
+            <a:pPr>
+              <a:spcAft>
+                <a:spcPts val="1000"/>
+              </a:spcAft>
+            </a:pPr>
+            <a:r>
+              <a:rPr sz="1600" b="0" i="0">
+                <a:solidFill>
+                  <a:srgbClr val="2B2B2B"/>
+                </a:solidFill>
+                <a:latin typeface="Calibri"/>
+              </a:rPr>
+              <a:t>–   Suba S10_Socializacion_Apellido con el guion de pitch y las notas de retroalimentación recibidas.</a:t>
+            </a:r>
+          </a:p>
+          <a:p>
+            <a:pPr>
+              <a:spcAft>
+                <a:spcPts val="1000"/>
+              </a:spcAft>
+            </a:pPr>
+            <a:r>
+              <a:rPr sz="1600" b="0" i="0">
+                <a:solidFill>
+                  <a:srgbClr val="2B2B2B"/>
+                </a:solidFill>
+                <a:latin typeface="Calibri"/>
+              </a:rPr>
+              <a:t>–   Incorpore al documento las sugerencias que decidió tomar; deje registrada en una línea la razón de las que descartó.</a:t>
+            </a:r>
+          </a:p>
+          <a:p>
+            <a:pPr>
+              <a:spcAft>
+                <a:spcPts val="1000"/>
+              </a:spcAft>
+            </a:pPr>
+            <a:r>
+              <a:rPr sz="1600" b="0" i="0">
+                <a:solidFill>
+                  <a:srgbClr val="2B2B2B"/>
+                </a:solidFill>
+                <a:latin typeface="Calibri"/>
+              </a:rPr>
+              <a:t>–   Grábese dando el pitch con el celular y véase una vez: la mayoría descubre que habla demasiado rápido al comienzo.</a:t>
+            </a:r>
+          </a:p>
+          <a:p>
+            <a:pPr>
+              <a:spcAft>
+                <a:spcPts val="1000"/>
+              </a:spcAft>
+            </a:pPr>
+            <a:r>
+              <a:rPr sz="1600" b="0" i="0">
+                <a:solidFill>
+                  <a:srgbClr val="2B2B2B"/>
+                </a:solidFill>
+                <a:latin typeface="Calibri"/>
+              </a:rPr>
+              <a:t>–   Guarde el guion: es la base directa de la sustentación de TG3, solo que allá tendrá resultados que contar.</a:t>
+            </a:r>
+          </a:p>
+          <a:p>
+            <a:pPr>
+              <a:spcAft>
+                <a:spcPts val="1000"/>
+              </a:spcAft>
+            </a:pPr>
+            <a:r>
+              <a:rPr sz="1600" b="0" i="0">
+                <a:solidFill>
+                  <a:srgbClr val="2B2B2B"/>
+                </a:solidFill>
+                <a:latin typeface="Calibri"/>
+              </a:rPr>
+              <a:t>–   </a:t>
+            </a:r>
+            <a:r>
+              <a:rPr sz="1600" b="1" i="0">
+                <a:solidFill>
+                  <a:srgbClr val="2B2B2B"/>
+                </a:solidFill>
+                <a:latin typeface="Calibri"/>
+              </a:rPr>
+              <a:t>Próxima sesión, la última sincrónica:</a:t>
+            </a:r>
+            <a:r>
+              <a:rPr sz="1600" b="0" i="0">
+                <a:solidFill>
+                  <a:srgbClr val="2B2B2B"/>
+                </a:solidFill>
+                <a:latin typeface="Calibri"/>
+              </a:rPr>
+              <a:t> cerramos el avance de TG2 y armamos el puente hacia TG3.</a:t>
+            </a:r>
+          </a:p>
+          <a:p>
+            <a:pPr lvl="1">
+              <a:spcAft>
+                <a:spcPts val="600"/>
+              </a:spcAft>
+            </a:pPr>
+            <a:r>
+              <a:rPr sz="1500" b="0" i="0">
+                <a:solidFill>
+                  <a:srgbClr val="2B2B2B"/>
+                </a:solidFill>
+                <a:latin typeface="Calibri"/>
+              </a:rPr>
+              <a:t>●   Llegue con el documento consolidado y con la lista de lo que le quedó a medias: eso se convierte en su plan del próximo semestre.</a:t>
+            </a:r>
+          </a:p>
+        </p:txBody>
+      </p:sp>
+      <p:sp>
+        <p:nvSpPr>
+          <p:cNvPr id="5" name="TextBox 4"/>
+          <p:cNvSpPr txBox="1"/>
+          <p:nvPr/>
+        </p:nvSpPr>
+        <p:spPr>
+          <a:xfrm>
+            <a:off x="11094415" y="6446520"/>
+            <a:ext cx="548640" cy="274320"/>
+          </a:xfrm>
+          <a:prstGeom prst="rect">
+            <a:avLst/>
+          </a:prstGeom>
+          <a:noFill/>
+        </p:spPr>
+        <p:txBody>
+          <a:bodyPr wrap="square" anchor="t" lIns="0" rIns="0" tIns="0" bIns="0">
+            <a:spAutoFit/>
+          </a:bodyPr>
+          <a:lstStyle/>
+          <a:p>
+            <a:pPr algn="r"/>
+            <a:r>
+              <a:rPr sz="1000" b="1" i="0">
+                <a:solidFill>
+                  <a:srgbClr val="8F989D"/>
+                </a:solidFill>
+                <a:latin typeface="Calibri"/>
+              </a:rPr>
+              <a:t>18</a:t>
+            </a:r>
+          </a:p>
+        </p:txBody>
+      </p:sp>
+    </p:spTree>
+  </p:cSld>
+  <p:clrMapOvr>
+    <a:masterClrMapping/>
+  </p:clrMapOvr>
+</p:sld>
+</file>
+
+<file path=ppt/slides/slide19.xml><?xml version="1.0" encoding="utf-8"?>
+<p:sld xmlns:a="http://schemas.openxmlformats.org/drawingml/2006/main" xmlns:p="http://schemas.openxmlformats.org/presentationml/2006/main" xmlns:r="http://schemas.openxmlformats.org/officeDocument/2006/relationships">
+  <p:cSld>
+    <p:bg>
+      <p:bgPr>
+        <a:solidFill>
+          <a:srgbClr val="FFFFFF"/>
+        </a:solidFill>
+        <a:effectLst/>
+      </p:bgPr>
+    </p:bg>
+    <p:spTree>
+      <p:nvGrpSpPr>
+        <p:cNvPr id="1" name=""/>
+        <p:cNvGrpSpPr/>
+        <p:nvPr/>
+      </p:nvGrpSpPr>
+      <p:grpSpPr/>
+      <p:sp>
+        <p:nvSpPr>
+          <p:cNvPr id="2" name="Rectangle 1"/>
+          <p:cNvSpPr/>
+          <p:nvPr/>
+        </p:nvSpPr>
+        <p:spPr>
+          <a:xfrm>
+            <a:off x="0" y="0"/>
+            <a:ext cx="12191695" cy="1188720"/>
+          </a:xfrm>
+          <a:prstGeom prst="rect">
+            <a:avLst/>
+          </a:prstGeom>
+          <a:solidFill>
+            <a:srgbClr val="0C2340"/>
+          </a:solidFill>
+          <a:ln>
+            <a:noFill/>
+          </a:ln>
+          <a:effectLst/>
+        </p:spPr>
+        <p:style>
+          <a:lnRef idx="1">
+            <a:schemeClr val="accent1"/>
+          </a:lnRef>
+          <a:fillRef idx="3">
+            <a:schemeClr val="accent1"/>
+          </a:fillRef>
+          <a:effectRef idx="2">
+            <a:schemeClr val="accent1"/>
+          </a:effectRef>
+          <a:fontRef idx="minor">
+            <a:schemeClr val="lt1"/>
+          </a:fontRef>
+        </p:style>
+        <p:txBody>
+          <a:bodyPr rtlCol="0" anchor="ctr"/>
+          <a:lstStyle/>
+          <a:p>
+            <a:pPr algn="ctr"/>
+          </a:p>
+        </p:txBody>
+      </p:sp>
+      <p:sp>
+        <p:nvSpPr>
+          <p:cNvPr id="3" name="TextBox 2"/>
+          <p:cNvSpPr txBox="1"/>
+          <p:nvPr/>
+        </p:nvSpPr>
+        <p:spPr>
+          <a:xfrm>
+            <a:off x="640080" y="0"/>
+            <a:ext cx="9082735" cy="1188720"/>
+          </a:xfrm>
+          <a:prstGeom prst="rect">
+            <a:avLst/>
+          </a:prstGeom>
+          <a:noFill/>
+        </p:spPr>
+        <p:txBody>
+          <a:bodyPr wrap="square" anchor="ctr" lIns="0" rIns="0" tIns="0" bIns="0">
+            <a:spAutoFit/>
+          </a:bodyPr>
+          <a:lstStyle/>
+          <a:p>
+            <a:pPr algn="ctr"/>
+            <a:r>
+              <a:rPr sz="2600" b="1" i="0">
+                <a:solidFill>
+                  <a:srgbClr val="FFFFFF"/>
+                </a:solidFill>
+                <a:latin typeface="Calibri"/>
+              </a:rPr>
+              <a:t>RUTA DE ENTREGABLES DEL CURSO</a:t>
+            </a:r>
+          </a:p>
+        </p:txBody>
+      </p:sp>
+      <p:sp>
+        <p:nvSpPr>
+          <p:cNvPr id="4" name="TextBox 3"/>
+          <p:cNvSpPr txBox="1"/>
+          <p:nvPr/>
+        </p:nvSpPr>
+        <p:spPr>
+          <a:xfrm>
+            <a:off x="640080" y="1280160"/>
+            <a:ext cx="10911535" cy="411480"/>
+          </a:xfrm>
+          <a:prstGeom prst="rect">
+            <a:avLst/>
+          </a:prstGeom>
+          <a:noFill/>
+        </p:spPr>
+        <p:txBody>
+          <a:bodyPr wrap="square" anchor="t" lIns="0" rIns="0" tIns="0" bIns="0">
+            <a:spAutoFit/>
+          </a:bodyPr>
+          <a:lstStyle/>
+          <a:p>
+            <a:pPr algn="ctr"/>
+            <a:r>
+              <a:rPr sz="1500" b="0" i="0">
+                <a:solidFill>
+                  <a:srgbClr val="2B2B2B"/>
+                </a:solidFill>
+                <a:latin typeface="Calibri"/>
+              </a:rPr>
+              <a:t>Sin fechas a propósito: aquí va </a:t>
+            </a:r>
+            <a:r>
+              <a:rPr sz="1500" b="1" i="0">
+                <a:solidFill>
+                  <a:srgbClr val="2B2B2B"/>
+                </a:solidFill>
+                <a:latin typeface="Calibri"/>
+              </a:rPr>
+              <a:t>en qué punto del curso</a:t>
+            </a:r>
+            <a:r>
+              <a:rPr sz="1500" b="0" i="0">
+                <a:solidFill>
+                  <a:srgbClr val="2B2B2B"/>
+                </a:solidFill>
+                <a:latin typeface="Calibri"/>
+              </a:rPr>
+              <a:t> cierra cada ítem · la ventana exacta la fija CDigital</a:t>
+            </a:r>
+          </a:p>
+        </p:txBody>
+      </p:sp>
+      <p:graphicFrame>
+        <p:nvGraphicFramePr>
+          <p:cNvPr id="5" name="Table 4"/>
+          <p:cNvGraphicFramePr>
+            <a:graphicFrameLocks noGrp="1"/>
+          </p:cNvGraphicFramePr>
+          <p:nvPr/>
+        </p:nvGraphicFramePr>
+        <p:xfrm>
+          <a:off x="640080" y="2011679"/>
+          <a:ext cx="10911533" cy="4297680"/>
+        </p:xfrm>
+        <a:graphic>
+          <a:graphicData uri="http://schemas.openxmlformats.org/drawingml/2006/table">
+            <a:tbl>
+              <a:tblPr>
+                <a:tableStyleId>{2D5ABB26-0587-4C30-8999-92F81FD0307C}</a:tableStyleId>
+              </a:tblPr>
+              <a:tblGrid>
+                <a:gridCol w="2659113"/>
+                <a:gridCol w="2659113"/>
+                <a:gridCol w="5593307"/>
+              </a:tblGrid>
+              <a:tr h="477520">
+                <a:tc>
+                  <a:txBody>
+                    <a:bodyPr/>
+                    <a:lstStyle/>
+                    <a:p>
+                      <a:pPr algn="l"/>
+                      <a:r>
+                        <a:rPr sz="1300" b="1" i="0">
+                          <a:solidFill>
+                            <a:srgbClr val="FFFFFF"/>
+                          </a:solidFill>
+                          <a:latin typeface="Calibri"/>
+                        </a:rPr>
+                        <a:t>Cierra en la semana de…</a:t>
+                      </a:r>
+                    </a:p>
+                  </a:txBody>
+                  <a:tcPr anchor="ctr" marL="109728" marR="91440" marT="36576" marB="36576">
+                    <a:solidFill>
+                      <a:srgbClr val="0C2340"/>
+                    </a:solidFill>
+                  </a:tcPr>
+                </a:tc>
+                <a:tc>
+                  <a:txBody>
+                    <a:bodyPr/>
+                    <a:lstStyle/>
+                    <a:p>
+                      <a:pPr algn="l"/>
+                      <a:r>
+                        <a:rPr sz="1300" b="1" i="0">
+                          <a:solidFill>
+                            <a:srgbClr val="FFFFFF"/>
+                          </a:solidFill>
+                          <a:latin typeface="Calibri"/>
+                        </a:rPr>
+                        <a:t>Entregable</a:t>
+                      </a:r>
+                    </a:p>
+                  </a:txBody>
+                  <a:tcPr anchor="ctr" marL="109728" marR="91440" marT="36576" marB="36576">
+                    <a:solidFill>
+                      <a:srgbClr val="0C2340"/>
+                    </a:solidFill>
+                  </a:tcPr>
+                </a:tc>
+                <a:tc>
+                  <a:txBody>
+                    <a:bodyPr/>
+                    <a:lstStyle/>
+                    <a:p>
+                      <a:pPr algn="l"/>
+                      <a:r>
+                        <a:rPr sz="1300" b="1" i="0">
+                          <a:solidFill>
+                            <a:srgbClr val="FFFFFF"/>
+                          </a:solidFill>
+                          <a:latin typeface="Calibri"/>
+                        </a:rPr>
+                        <a:t>Qué debes tener listo</a:t>
+                      </a:r>
+                    </a:p>
+                  </a:txBody>
+                  <a:tcPr anchor="ctr" marL="109728" marR="91440" marT="36576" marB="36576">
+                    <a:solidFill>
+                      <a:srgbClr val="0C2340"/>
+                    </a:solidFill>
+                  </a:tcPr>
+                </a:tc>
+              </a:tr>
+              <a:tr h="477520">
+                <a:tc>
+                  <a:txBody>
+                    <a:bodyPr/>
+                    <a:lstStyle/>
+                    <a:p>
+                      <a:pPr algn="l"/>
+                      <a:r>
+                        <a:rPr sz="1100" b="1" i="0">
+                          <a:solidFill>
+                            <a:srgbClr val="2B2B2B"/>
+                          </a:solidFill>
+                          <a:latin typeface="Calibri"/>
+                        </a:rPr>
+                        <a:t>Sesión 03</a:t>
+                      </a:r>
+                      <a:r>
+                        <a:rPr sz="1100" b="0" i="0">
+                          <a:solidFill>
+                            <a:srgbClr val="2B2B2B"/>
+                          </a:solidFill>
+                          <a:latin typeface="Calibri"/>
+                        </a:rPr>
+                        <a:t> · ya cerró</a:t>
+                      </a:r>
+                    </a:p>
+                  </a:txBody>
+                  <a:tcPr anchor="ctr" marL="109728" marR="91440" marT="36576" marB="36576">
+                    <a:solidFill>
+                      <a:srgbClr val="FFFFFF"/>
+                    </a:solidFill>
+                  </a:tcPr>
+                </a:tc>
+                <a:tc>
+                  <a:txBody>
+                    <a:bodyPr/>
+                    <a:lstStyle/>
+                    <a:p>
+                      <a:pPr algn="l"/>
+                      <a:r>
+                        <a:rPr sz="1100" b="1" i="0">
+                          <a:solidFill>
+                            <a:srgbClr val="2B2B2B"/>
+                          </a:solidFill>
+                          <a:latin typeface="Calibri"/>
+                        </a:rPr>
+                        <a:t>Quiz 1</a:t>
+                      </a:r>
+                      <a:r>
+                        <a:rPr sz="1100" b="0" i="0">
+                          <a:solidFill>
+                            <a:srgbClr val="2B2B2B"/>
+                          </a:solidFill>
+                          <a:latin typeface="Calibri"/>
+                        </a:rPr>
+                        <a:t> · Cuestionario · 6%</a:t>
+                      </a:r>
+                    </a:p>
+                  </a:txBody>
+                  <a:tcPr anchor="ctr" marL="109728" marR="91440" marT="36576" marB="36576">
+                    <a:solidFill>
+                      <a:srgbClr val="FFFFFF"/>
+                    </a:solidFill>
+                  </a:tcPr>
+                </a:tc>
+                <a:tc>
+                  <a:txBody>
+                    <a:bodyPr/>
+                    <a:lstStyle/>
+                    <a:p>
+                      <a:pPr algn="l"/>
+                      <a:r>
+                        <a:rPr sz="1100" b="0" i="0">
+                          <a:solidFill>
+                            <a:srgbClr val="2B2B2B"/>
+                          </a:solidFill>
+                          <a:latin typeface="Calibri"/>
+                        </a:rPr>
+                        <a:t>Ten formulados </a:t>
+                      </a:r>
+                      <a:r>
+                        <a:rPr sz="1100" b="1" i="0">
+                          <a:solidFill>
+                            <a:srgbClr val="2B2B2B"/>
+                          </a:solidFill>
+                          <a:latin typeface="Calibri"/>
+                        </a:rPr>
+                        <a:t>pregunta, objetivos y título</a:t>
+                      </a:r>
+                      <a:r>
+                        <a:rPr sz="1100" b="0" i="0">
+                          <a:solidFill>
+                            <a:srgbClr val="2B2B2B"/>
+                          </a:solidFill>
+                          <a:latin typeface="Calibri"/>
+                        </a:rPr>
+                        <a:t> provisional.</a:t>
+                      </a:r>
+                    </a:p>
+                  </a:txBody>
+                  <a:tcPr anchor="ctr" marL="109728" marR="91440" marT="36576" marB="36576">
+                    <a:solidFill>
+                      <a:srgbClr val="FFFFFF"/>
+                    </a:solidFill>
+                  </a:tcPr>
+                </a:tc>
+              </a:tr>
+              <a:tr h="477520">
+                <a:tc>
+                  <a:txBody>
+                    <a:bodyPr/>
+                    <a:lstStyle/>
+                    <a:p>
+                      <a:pPr algn="l"/>
+                      <a:r>
+                        <a:rPr sz="1100" b="1" i="0">
+                          <a:solidFill>
+                            <a:srgbClr val="2B2B2B"/>
+                          </a:solidFill>
+                          <a:latin typeface="Calibri"/>
+                        </a:rPr>
+                        <a:t>Sesión 05</a:t>
+                      </a:r>
+                      <a:r>
+                        <a:rPr sz="1100" b="0" i="0">
+                          <a:solidFill>
+                            <a:srgbClr val="2B2B2B"/>
+                          </a:solidFill>
+                          <a:latin typeface="Calibri"/>
+                        </a:rPr>
+                        <a:t> · ya cerró</a:t>
+                      </a:r>
+                    </a:p>
+                  </a:txBody>
+                  <a:tcPr anchor="ctr" marL="109728" marR="91440" marT="36576" marB="36576">
+                    <a:solidFill>
+                      <a:srgbClr val="F2F2F2"/>
+                    </a:solidFill>
+                  </a:tcPr>
+                </a:tc>
+                <a:tc>
+                  <a:txBody>
+                    <a:bodyPr/>
+                    <a:lstStyle/>
+                    <a:p>
+                      <a:pPr algn="l"/>
+                      <a:r>
+                        <a:rPr sz="1100" b="1" i="0">
+                          <a:solidFill>
+                            <a:srgbClr val="2B2B2B"/>
+                          </a:solidFill>
+                          <a:latin typeface="Calibri"/>
+                        </a:rPr>
+                        <a:t>Parcial 1</a:t>
+                      </a:r>
+                      <a:r>
+                        <a:rPr sz="1100" b="0" i="0">
+                          <a:solidFill>
+                            <a:srgbClr val="2B2B2B"/>
+                          </a:solidFill>
+                          <a:latin typeface="Calibri"/>
+                        </a:rPr>
+                        <a:t> · Cuestionario · 24%</a:t>
+                      </a:r>
+                    </a:p>
+                  </a:txBody>
+                  <a:tcPr anchor="ctr" marL="109728" marR="91440" marT="36576" marB="36576">
+                    <a:solidFill>
+                      <a:srgbClr val="F2F2F2"/>
+                    </a:solidFill>
+                  </a:tcPr>
+                </a:tc>
+                <a:tc>
+                  <a:txBody>
+                    <a:bodyPr/>
+                    <a:lstStyle/>
+                    <a:p>
+                      <a:pPr algn="l"/>
+                      <a:r>
+                        <a:rPr sz="1100" b="0" i="0">
+                          <a:solidFill>
+                            <a:srgbClr val="2B2B2B"/>
+                          </a:solidFill>
+                          <a:latin typeface="Calibri"/>
+                        </a:rPr>
+                        <a:t>Repasa </a:t>
+                      </a:r>
+                      <a:r>
+                        <a:rPr sz="1100" b="1" i="0">
+                          <a:solidFill>
+                            <a:srgbClr val="2B2B2B"/>
+                          </a:solidFill>
+                          <a:latin typeface="Calibri"/>
+                        </a:rPr>
+                        <a:t>estructura APA CUN</a:t>
+                      </a:r>
+                      <a:r>
+                        <a:rPr sz="1100" b="0" i="0">
+                          <a:solidFill>
+                            <a:srgbClr val="2B2B2B"/>
+                          </a:solidFill>
+                          <a:latin typeface="Calibri"/>
+                        </a:rPr>
+                        <a:t> y antecedentes Fase I, más pregunta, objetivos y título.</a:t>
+                      </a:r>
+                    </a:p>
+                  </a:txBody>
+                  <a:tcPr anchor="ctr" marL="109728" marR="91440" marT="36576" marB="36576">
+                    <a:solidFill>
+                      <a:srgbClr val="F2F2F2"/>
+                    </a:solidFill>
+                  </a:tcPr>
+                </a:tc>
+              </a:tr>
+              <a:tr h="477520">
+                <a:tc>
+                  <a:txBody>
+                    <a:bodyPr/>
+                    <a:lstStyle/>
+                    <a:p>
+                      <a:pPr algn="l"/>
+                      <a:r>
+                        <a:rPr sz="1100" b="1" i="0">
+                          <a:solidFill>
+                            <a:srgbClr val="2B2B2B"/>
+                          </a:solidFill>
+                          <a:latin typeface="Calibri"/>
+                        </a:rPr>
+                        <a:t>Sesión 07</a:t>
+                      </a:r>
+                      <a:r>
+                        <a:rPr sz="1100" b="0" i="0">
+                          <a:solidFill>
+                            <a:srgbClr val="2B2B2B"/>
+                          </a:solidFill>
+                          <a:latin typeface="Calibri"/>
+                        </a:rPr>
+                        <a:t> · ya cerró</a:t>
+                      </a:r>
+                    </a:p>
+                  </a:txBody>
+                  <a:tcPr anchor="ctr" marL="109728" marR="91440" marT="36576" marB="36576">
+                    <a:solidFill>
+                      <a:srgbClr val="FFFFFF"/>
+                    </a:solidFill>
+                  </a:tcPr>
+                </a:tc>
+                <a:tc>
+                  <a:txBody>
+                    <a:bodyPr/>
+                    <a:lstStyle/>
+                    <a:p>
+                      <a:pPr algn="l"/>
+                      <a:r>
+                        <a:rPr sz="1100" b="1" i="0">
+                          <a:solidFill>
+                            <a:srgbClr val="2B2B2B"/>
+                          </a:solidFill>
+                          <a:latin typeface="Calibri"/>
+                        </a:rPr>
+                        <a:t>Quiz 2</a:t>
+                      </a:r>
+                      <a:r>
+                        <a:rPr sz="1100" b="0" i="0">
+                          <a:solidFill>
+                            <a:srgbClr val="2B2B2B"/>
+                          </a:solidFill>
+                          <a:latin typeface="Calibri"/>
+                        </a:rPr>
+                        <a:t> · Cuestionario · 9%</a:t>
+                      </a:r>
+                    </a:p>
+                  </a:txBody>
+                  <a:tcPr anchor="ctr" marL="109728" marR="91440" marT="36576" marB="36576">
+                    <a:solidFill>
+                      <a:srgbClr val="FFFFFF"/>
+                    </a:solidFill>
+                  </a:tcPr>
+                </a:tc>
+                <a:tc>
+                  <a:txBody>
+                    <a:bodyPr/>
+                    <a:lstStyle/>
+                    <a:p>
+                      <a:pPr algn="l"/>
+                      <a:r>
+                        <a:rPr sz="1100" b="0" i="0">
+                          <a:solidFill>
+                            <a:srgbClr val="2B2B2B"/>
+                          </a:solidFill>
+                          <a:latin typeface="Calibri"/>
+                        </a:rPr>
+                        <a:t>Distingue </a:t>
+                      </a:r>
+                      <a:r>
+                        <a:rPr sz="1100" b="1" i="0">
+                          <a:solidFill>
+                            <a:srgbClr val="2B2B2B"/>
+                          </a:solidFill>
+                          <a:latin typeface="Calibri"/>
+                        </a:rPr>
+                        <a:t>marco teórico, conceptual y contextual</a:t>
+                      </a:r>
+                      <a:r>
+                        <a:rPr sz="1100" b="0" i="0">
+                          <a:solidFill>
+                            <a:srgbClr val="2B2B2B"/>
+                          </a:solidFill>
+                          <a:latin typeface="Calibri"/>
+                        </a:rPr>
+                        <a:t> y cómo se articulan con tu pregunta.</a:t>
+                      </a:r>
+                    </a:p>
+                  </a:txBody>
+                  <a:tcPr anchor="ctr" marL="109728" marR="91440" marT="36576" marB="36576">
+                    <a:solidFill>
+                      <a:srgbClr val="FFFFFF"/>
+                    </a:solidFill>
+                  </a:tcPr>
+                </a:tc>
+              </a:tr>
+              <a:tr h="477520">
+                <a:tc>
+                  <a:txBody>
+                    <a:bodyPr/>
+                    <a:lstStyle/>
+                    <a:p>
+                      <a:pPr algn="l"/>
+                      <a:r>
+                        <a:rPr sz="1100" b="1" i="0">
+                          <a:solidFill>
+                            <a:srgbClr val="2B2B2B"/>
+                          </a:solidFill>
+                          <a:latin typeface="Calibri"/>
+                        </a:rPr>
+                        <a:t>Sesión 08</a:t>
+                      </a:r>
+                      <a:r>
+                        <a:rPr sz="1100" b="0" i="0">
+                          <a:solidFill>
+                            <a:srgbClr val="2B2B2B"/>
+                          </a:solidFill>
+                          <a:latin typeface="Calibri"/>
+                        </a:rPr>
+                        <a:t> · ya cerró</a:t>
+                      </a:r>
+                    </a:p>
+                  </a:txBody>
+                  <a:tcPr anchor="ctr" marL="109728" marR="91440" marT="36576" marB="36576">
+                    <a:solidFill>
+                      <a:srgbClr val="F2F2F2"/>
+                    </a:solidFill>
+                  </a:tcPr>
+                </a:tc>
+                <a:tc>
+                  <a:txBody>
+                    <a:bodyPr/>
+                    <a:lstStyle/>
+                    <a:p>
+                      <a:pPr algn="l"/>
+                      <a:r>
+                        <a:rPr sz="1100" b="1" i="0">
+                          <a:solidFill>
+                            <a:srgbClr val="2B2B2B"/>
+                          </a:solidFill>
+                          <a:latin typeface="Calibri"/>
+                        </a:rPr>
+                        <a:t>Parcial 2</a:t>
+                      </a:r>
+                      <a:r>
+                        <a:rPr sz="1100" b="0" i="0">
+                          <a:solidFill>
+                            <a:srgbClr val="2B2B2B"/>
+                          </a:solidFill>
+                          <a:latin typeface="Calibri"/>
+                        </a:rPr>
+                        <a:t> · Cuestionario · 21%</a:t>
+                      </a:r>
+                    </a:p>
+                  </a:txBody>
+                  <a:tcPr anchor="ctr" marL="109728" marR="91440" marT="36576" marB="36576">
+                    <a:solidFill>
+                      <a:srgbClr val="F2F2F2"/>
+                    </a:solidFill>
+                  </a:tcPr>
+                </a:tc>
+                <a:tc>
+                  <a:txBody>
+                    <a:bodyPr/>
+                    <a:lstStyle/>
+                    <a:p>
+                      <a:pPr algn="l"/>
+                      <a:r>
+                        <a:rPr sz="1100" b="0" i="0">
+                          <a:solidFill>
+                            <a:srgbClr val="2B2B2B"/>
+                          </a:solidFill>
+                          <a:latin typeface="Calibri"/>
+                        </a:rPr>
+                        <a:t>Repasa los tres marcos y el </a:t>
+                      </a:r>
+                      <a:r>
+                        <a:rPr sz="1100" b="1" i="0">
+                          <a:solidFill>
+                            <a:srgbClr val="2B2B2B"/>
+                          </a:solidFill>
+                          <a:latin typeface="Calibri"/>
+                        </a:rPr>
+                        <a:t>diseño metodológico</a:t>
+                      </a:r>
+                      <a:r>
+                        <a:rPr sz="1100" b="0" i="0">
+                          <a:solidFill>
+                            <a:srgbClr val="2B2B2B"/>
+                          </a:solidFill>
+                          <a:latin typeface="Calibri"/>
+                        </a:rPr>
+                        <a:t>: enfoque, tipo, alcance y diseño.</a:t>
+                      </a:r>
+                    </a:p>
+                  </a:txBody>
+                  <a:tcPr anchor="ctr" marL="109728" marR="91440" marT="36576" marB="36576">
+                    <a:solidFill>
+                      <a:srgbClr val="F2F2F2"/>
+                    </a:solidFill>
+                  </a:tcPr>
+                </a:tc>
+              </a:tr>
+              <a:tr h="477520">
+                <a:tc>
+                  <a:txBody>
+                    <a:bodyPr/>
+                    <a:lstStyle/>
+                    <a:p>
+                      <a:pPr algn="l"/>
+                      <a:r>
+                        <a:rPr sz="1100" b="1" i="0">
+                          <a:solidFill>
+                            <a:srgbClr val="2B2B2B"/>
+                          </a:solidFill>
+                          <a:latin typeface="Calibri"/>
+                        </a:rPr>
+                        <a:t>Sesión 10</a:t>
+                      </a:r>
+                      <a:r>
+                        <a:rPr sz="1100" b="0" i="0">
+                          <a:solidFill>
+                            <a:srgbClr val="2B2B2B"/>
+                          </a:solidFill>
+                          <a:latin typeface="Calibri"/>
+                        </a:rPr>
+                        <a:t> · cierra esta semana</a:t>
+                      </a:r>
+                    </a:p>
+                  </a:txBody>
+                  <a:tcPr anchor="ctr" marL="109728" marR="91440" marT="36576" marB="36576">
+                    <a:solidFill>
+                      <a:srgbClr val="FFFFFF"/>
+                    </a:solidFill>
+                  </a:tcPr>
+                </a:tc>
+                <a:tc>
+                  <a:txBody>
+                    <a:bodyPr/>
+                    <a:lstStyle/>
+                    <a:p>
+                      <a:pPr algn="l"/>
+                      <a:r>
+                        <a:rPr sz="1100" b="1" i="0">
+                          <a:solidFill>
+                            <a:srgbClr val="2B2B2B"/>
+                          </a:solidFill>
+                          <a:latin typeface="Calibri"/>
+                        </a:rPr>
+                        <a:t>Quiz 3</a:t>
+                      </a:r>
+                      <a:r>
+                        <a:rPr sz="1100" b="0" i="0">
+                          <a:solidFill>
+                            <a:srgbClr val="2B2B2B"/>
+                          </a:solidFill>
+                          <a:latin typeface="Calibri"/>
+                        </a:rPr>
+                        <a:t> · Cuestionario · 4%</a:t>
+                      </a:r>
+                    </a:p>
+                  </a:txBody>
+                  <a:tcPr anchor="ctr" marL="109728" marR="91440" marT="36576" marB="36576">
+                    <a:solidFill>
+                      <a:srgbClr val="FFFFFF"/>
+                    </a:solidFill>
+                  </a:tcPr>
+                </a:tc>
+                <a:tc>
+                  <a:txBody>
+                    <a:bodyPr/>
+                    <a:lstStyle/>
+                    <a:p>
+                      <a:pPr algn="l"/>
+                      <a:r>
+                        <a:rPr sz="1100" b="0" i="0">
+                          <a:solidFill>
+                            <a:srgbClr val="2B2B2B"/>
+                          </a:solidFill>
+                          <a:latin typeface="Calibri"/>
+                        </a:rPr>
+                        <a:t>Ten claros </a:t>
+                      </a:r>
+                      <a:r>
+                        <a:rPr sz="1100" b="1" i="0">
+                          <a:solidFill>
+                            <a:srgbClr val="2B2B2B"/>
+                          </a:solidFill>
+                          <a:latin typeface="Calibri"/>
+                        </a:rPr>
+                        <a:t>instrumentos y plan de análisis</a:t>
+                      </a:r>
+                      <a:r>
+                        <a:rPr sz="1100" b="0" i="0">
+                          <a:solidFill>
+                            <a:srgbClr val="2B2B2B"/>
+                          </a:solidFill>
+                          <a:latin typeface="Calibri"/>
+                        </a:rPr>
+                        <a:t> propuestos y la integración del avance.</a:t>
+                      </a:r>
+                    </a:p>
+                  </a:txBody>
+                  <a:tcPr anchor="ctr" marL="109728" marR="91440" marT="36576" marB="36576">
+                    <a:solidFill>
+                      <a:srgbClr val="FFFFFF"/>
+                    </a:solidFill>
+                  </a:tcPr>
+                </a:tc>
+              </a:tr>
+              <a:tr h="477520">
+                <a:tc>
+                  <a:txBody>
+                    <a:bodyPr/>
+                    <a:lstStyle/>
+                    <a:p>
+                      <a:pPr algn="l"/>
+                      <a:r>
+                        <a:rPr sz="1100" b="1" i="0">
+                          <a:solidFill>
+                            <a:srgbClr val="2B2B2B"/>
+                          </a:solidFill>
+                          <a:latin typeface="Calibri"/>
+                        </a:rPr>
+                        <a:t>Sesión 11</a:t>
+                      </a:r>
+                      <a:r>
+                        <a:rPr sz="1100" b="0" i="0">
+                          <a:solidFill>
+                            <a:srgbClr val="2B2B2B"/>
+                          </a:solidFill>
+                          <a:latin typeface="Calibri"/>
+                        </a:rPr>
+                        <a:t> · pendiente</a:t>
+                      </a:r>
+                    </a:p>
+                  </a:txBody>
+                  <a:tcPr anchor="ctr" marL="109728" marR="91440" marT="36576" marB="36576">
+                    <a:solidFill>
+                      <a:srgbClr val="F2F2F2"/>
+                    </a:solidFill>
+                  </a:tcPr>
+                </a:tc>
+                <a:tc>
+                  <a:txBody>
+                    <a:bodyPr/>
+                    <a:lstStyle/>
+                    <a:p>
+                      <a:pPr algn="l"/>
+                      <a:r>
+                        <a:rPr sz="1100" b="1" i="0">
+                          <a:solidFill>
+                            <a:srgbClr val="2B2B2B"/>
+                          </a:solidFill>
+                          <a:latin typeface="Calibri"/>
+                        </a:rPr>
+                        <a:t>ACA Final</a:t>
+                      </a:r>
+                      <a:r>
+                        <a:rPr sz="1100" b="0" i="0">
+                          <a:solidFill>
+                            <a:srgbClr val="2B2B2B"/>
+                          </a:solidFill>
+                          <a:latin typeface="Calibri"/>
+                        </a:rPr>
+                        <a:t> · Tarea · 32,8%</a:t>
+                      </a:r>
+                    </a:p>
+                  </a:txBody>
+                  <a:tcPr anchor="ctr" marL="109728" marR="91440" marT="36576" marB="36576">
+                    <a:solidFill>
+                      <a:srgbClr val="F2F2F2"/>
+                    </a:solidFill>
+                  </a:tcPr>
+                </a:tc>
+                <a:tc>
+                  <a:txBody>
+                    <a:bodyPr/>
+                    <a:lstStyle/>
+                    <a:p>
+                      <a:pPr algn="l"/>
+                      <a:r>
+                        <a:rPr sz="1100" b="0" i="0">
+                          <a:solidFill>
+                            <a:srgbClr val="2B2B2B"/>
+                          </a:solidFill>
+                          <a:latin typeface="Calibri"/>
+                        </a:rPr>
+                        <a:t>Sube el </a:t>
+                      </a:r>
+                      <a:r>
+                        <a:rPr sz="1100" b="1" i="0">
+                          <a:solidFill>
+                            <a:srgbClr val="2B2B2B"/>
+                          </a:solidFill>
+                          <a:latin typeface="Calibri"/>
+                        </a:rPr>
+                        <a:t>avance consolidado</a:t>
+                      </a:r>
+                      <a:r>
+                        <a:rPr sz="1100" b="0" i="0">
+                          <a:solidFill>
+                            <a:srgbClr val="2B2B2B"/>
+                          </a:solidFill>
+                          <a:latin typeface="Calibri"/>
+                        </a:rPr>
+                        <a:t> en plantilla APA CUN, integrado y listo para TG3.</a:t>
+                      </a:r>
+                    </a:p>
+                  </a:txBody>
+                  <a:tcPr anchor="ctr" marL="109728" marR="91440" marT="36576" marB="36576">
+                    <a:solidFill>
+                      <a:srgbClr val="F2F2F2"/>
+                    </a:solidFill>
+                  </a:tcPr>
+                </a:tc>
+              </a:tr>
+              <a:tr h="477520">
+                <a:tc>
+                  <a:txBody>
+                    <a:bodyPr/>
+                    <a:lstStyle/>
+                    <a:p>
+                      <a:pPr algn="l"/>
+                      <a:r>
+                        <a:rPr sz="1100" b="1" i="0">
+                          <a:solidFill>
+                            <a:srgbClr val="2B2B2B"/>
+                          </a:solidFill>
+                          <a:latin typeface="Calibri"/>
+                        </a:rPr>
+                        <a:t>Sesión 11</a:t>
+                      </a:r>
+                      <a:r>
+                        <a:rPr sz="1100" b="0" i="0">
+                          <a:solidFill>
+                            <a:srgbClr val="2B2B2B"/>
+                          </a:solidFill>
+                          <a:latin typeface="Calibri"/>
+                        </a:rPr>
+                        <a:t> · pendiente</a:t>
+                      </a:r>
+                    </a:p>
+                  </a:txBody>
+                  <a:tcPr anchor="ctr" marL="109728" marR="91440" marT="36576" marB="36576">
+                    <a:solidFill>
+                      <a:srgbClr val="FFFFFF"/>
+                    </a:solidFill>
+                  </a:tcPr>
+                </a:tc>
+                <a:tc>
+                  <a:txBody>
+                    <a:bodyPr/>
+                    <a:lstStyle/>
+                    <a:p>
+                      <a:pPr algn="l"/>
+                      <a:r>
+                        <a:rPr sz="1100" b="1" i="0">
+                          <a:solidFill>
+                            <a:srgbClr val="2B2B2B"/>
+                          </a:solidFill>
+                          <a:latin typeface="Calibri"/>
+                        </a:rPr>
+                        <a:t>Autoevaluación</a:t>
+                      </a:r>
+                      <a:r>
+                        <a:rPr sz="1100" b="0" i="0">
+                          <a:solidFill>
+                            <a:srgbClr val="2B2B2B"/>
+                          </a:solidFill>
+                          <a:latin typeface="Calibri"/>
+                        </a:rPr>
+                        <a:t> · Cuestionario · 1,6%</a:t>
+                      </a:r>
+                    </a:p>
+                  </a:txBody>
+                  <a:tcPr anchor="ctr" marL="109728" marR="91440" marT="36576" marB="36576">
+                    <a:solidFill>
+                      <a:srgbClr val="FFFFFF"/>
+                    </a:solidFill>
+                  </a:tcPr>
+                </a:tc>
+                <a:tc>
+                  <a:txBody>
+                    <a:bodyPr/>
+                    <a:lstStyle/>
+                    <a:p>
+                      <a:pPr algn="l"/>
+                      <a:r>
+                        <a:rPr sz="1100" b="0" i="0">
+                          <a:solidFill>
+                            <a:srgbClr val="2B2B2B"/>
+                          </a:solidFill>
+                          <a:latin typeface="Calibri"/>
+                        </a:rPr>
+                        <a:t>Diligénciala tú, de forma </a:t>
+                      </a:r>
+                      <a:r>
+                        <a:rPr sz="1100" b="1" i="0">
+                          <a:solidFill>
+                            <a:srgbClr val="2B2B2B"/>
+                          </a:solidFill>
+                          <a:latin typeface="Calibri"/>
+                        </a:rPr>
+                        <a:t>individual</a:t>
+                      </a:r>
+                      <a:r>
+                        <a:rPr sz="1100" b="0" i="0">
+                          <a:solidFill>
+                            <a:srgbClr val="2B2B2B"/>
+                          </a:solidFill>
+                          <a:latin typeface="Calibri"/>
+                        </a:rPr>
+                        <a:t>, valorando tu participación real.</a:t>
+                      </a:r>
+                    </a:p>
+                  </a:txBody>
+                  <a:tcPr anchor="ctr" marL="109728" marR="91440" marT="36576" marB="36576">
+                    <a:solidFill>
+                      <a:srgbClr val="FFFFFF"/>
+                    </a:solidFill>
+                  </a:tcPr>
+                </a:tc>
+              </a:tr>
+              <a:tr h="477520">
+                <a:tc>
+                  <a:txBody>
+                    <a:bodyPr/>
+                    <a:lstStyle/>
+                    <a:p>
+                      <a:pPr algn="l"/>
+                      <a:r>
+                        <a:rPr sz="1100" b="1" i="0">
+                          <a:solidFill>
+                            <a:srgbClr val="2B2B2B"/>
+                          </a:solidFill>
+                          <a:latin typeface="Calibri"/>
+                        </a:rPr>
+                        <a:t>Sesión 11</a:t>
+                      </a:r>
+                      <a:r>
+                        <a:rPr sz="1100" b="0" i="0">
+                          <a:solidFill>
+                            <a:srgbClr val="2B2B2B"/>
+                          </a:solidFill>
+                          <a:latin typeface="Calibri"/>
+                        </a:rPr>
+                        <a:t> · pendiente</a:t>
+                      </a:r>
+                    </a:p>
+                  </a:txBody>
+                  <a:tcPr anchor="ctr" marL="109728" marR="91440" marT="36576" marB="36576">
+                    <a:solidFill>
+                      <a:srgbClr val="F2F2F2"/>
+                    </a:solidFill>
+                  </a:tcPr>
+                </a:tc>
+                <a:tc>
+                  <a:txBody>
+                    <a:bodyPr/>
+                    <a:lstStyle/>
+                    <a:p>
+                      <a:pPr algn="l"/>
+                      <a:r>
+                        <a:rPr sz="1100" b="1" i="0">
+                          <a:solidFill>
+                            <a:srgbClr val="2B2B2B"/>
+                          </a:solidFill>
+                          <a:latin typeface="Calibri"/>
+                        </a:rPr>
+                        <a:t>Coevaluación</a:t>
+                      </a:r>
+                      <a:r>
+                        <a:rPr sz="1100" b="0" i="0">
+                          <a:solidFill>
+                            <a:srgbClr val="2B2B2B"/>
+                          </a:solidFill>
+                          <a:latin typeface="Calibri"/>
+                        </a:rPr>
+                        <a:t> · Foro · 1,6%</a:t>
+                      </a:r>
+                    </a:p>
+                  </a:txBody>
+                  <a:tcPr anchor="ctr" marL="109728" marR="91440" marT="36576" marB="36576">
+                    <a:solidFill>
+                      <a:srgbClr val="F2F2F2"/>
+                    </a:solidFill>
+                  </a:tcPr>
+                </a:tc>
+                <a:tc>
+                  <a:txBody>
+                    <a:bodyPr/>
+                    <a:lstStyle/>
+                    <a:p>
+                      <a:pPr algn="l"/>
+                      <a:r>
+                        <a:rPr sz="1100" b="1" i="0">
+                          <a:solidFill>
+                            <a:srgbClr val="2B2B2B"/>
+                          </a:solidFill>
+                          <a:latin typeface="Calibri"/>
+                        </a:rPr>
+                        <a:t>Publica</a:t>
+                      </a:r>
+                      <a:r>
+                        <a:rPr sz="1100" b="0" i="0">
+                          <a:solidFill>
+                            <a:srgbClr val="2B2B2B"/>
+                          </a:solidFill>
+                          <a:latin typeface="Calibri"/>
+                        </a:rPr>
+                        <a:t> tu aporte: valora hechos del trabajo del equipo, nunca a las personas.</a:t>
+                      </a:r>
+                    </a:p>
+                  </a:txBody>
+                  <a:tcPr anchor="ctr" marL="109728" marR="91440" marT="36576" marB="36576">
+                    <a:solidFill>
+                      <a:srgbClr val="F2F2F2"/>
+                    </a:solidFill>
+                  </a:tcPr>
+                </a:tc>
+              </a:tr>
+            </a:tbl>
+          </a:graphicData>
+        </a:graphic>
+      </p:graphicFrame>
+      <p:sp>
+        <p:nvSpPr>
+          <p:cNvPr id="6" name="TextBox 5"/>
+          <p:cNvSpPr txBox="1"/>
+          <p:nvPr/>
+        </p:nvSpPr>
+        <p:spPr>
+          <a:xfrm>
+            <a:off x="640080" y="6080760"/>
+            <a:ext cx="10911535" cy="548640"/>
+          </a:xfrm>
+          <a:prstGeom prst="rect">
+            <a:avLst/>
+          </a:prstGeom>
+          <a:noFill/>
+        </p:spPr>
+        <p:txBody>
+          <a:bodyPr wrap="square" anchor="t" lIns="0" rIns="0" tIns="0" bIns="0">
+            <a:spAutoFit/>
+          </a:bodyPr>
+          <a:lstStyle/>
+          <a:p>
+            <a:r>
+              <a:rPr sz="1200" b="0" i="1">
+                <a:solidFill>
+                  <a:srgbClr val="2B2B2B"/>
+                </a:solidFill>
+                <a:latin typeface="Calibri"/>
+              </a:rPr>
+              <a:t>Esta misma tabla va al final de todas las sesiones. La </a:t>
+            </a:r>
+            <a:r>
+              <a:rPr sz="1200" b="1" i="1">
+                <a:solidFill>
+                  <a:srgbClr val="2B2B2B"/>
+                </a:solidFill>
+                <a:latin typeface="Calibri"/>
+              </a:rPr>
+              <a:t>fecha</a:t>
+            </a:r>
+            <a:r>
+              <a:rPr sz="1200" b="0" i="1">
+                <a:solidFill>
+                  <a:srgbClr val="2B2B2B"/>
+                </a:solidFill>
+                <a:latin typeface="Calibri"/>
+              </a:rPr>
+              <a:t> de cada ventana está en el enunciado del ítem (`Clases/Recursos/ACAs/`) y en el aula: si el aula y cualquier otro material se contradicen, </a:t>
+            </a:r>
+            <a:r>
+              <a:rPr sz="1200" b="1" i="1">
+                <a:solidFill>
+                  <a:srgbClr val="2B2B2B"/>
+                </a:solidFill>
+                <a:latin typeface="Calibri"/>
+              </a:rPr>
+              <a:t>manda el aula</a:t>
+            </a:r>
+            <a:r>
+              <a:rPr sz="1200" b="0" i="1">
+                <a:solidFill>
+                  <a:srgbClr val="2B2B2B"/>
+                </a:solidFill>
+                <a:latin typeface="Calibri"/>
+              </a:rPr>
+              <a:t>.</a:t>
+            </a:r>
+          </a:p>
+        </p:txBody>
+      </p:sp>
+      <p:sp>
+        <p:nvSpPr>
+          <p:cNvPr id="7" name="TextBox 6"/>
+          <p:cNvSpPr txBox="1"/>
+          <p:nvPr/>
+        </p:nvSpPr>
+        <p:spPr>
+          <a:xfrm>
+            <a:off x="11094415" y="6446520"/>
+            <a:ext cx="548640" cy="274320"/>
+          </a:xfrm>
+          <a:prstGeom prst="rect">
+            <a:avLst/>
+          </a:prstGeom>
+          <a:noFill/>
+        </p:spPr>
+        <p:txBody>
+          <a:bodyPr wrap="square" anchor="t" lIns="0" rIns="0" tIns="0" bIns="0">
+            <a:spAutoFit/>
+          </a:bodyPr>
+          <a:lstStyle/>
+          <a:p>
+            <a:pPr algn="r"/>
+            <a:r>
+              <a:rPr sz="1000" b="1" i="0">
+                <a:solidFill>
+                  <a:srgbClr val="8F989D"/>
+                </a:solidFill>
+                <a:latin typeface="Calibri"/>
+              </a:rPr>
+              <a:t>19</a:t>
+            </a:r>
+          </a:p>
+        </p:txBody>
+      </p:sp>
+    </p:spTree>
+  </p:cSld>
+  <p:clrMapOvr>
+    <a:masterClrMapping/>
+  </p:clrMapOvr>
+</p:sld>
+</file>
+
+<file path=ppt/slides/slide2.xml><?xml version="1.0" encoding="utf-8"?>
+<p:sld xmlns:a="http://schemas.openxmlformats.org/drawingml/2006/main" xmlns:p="http://schemas.openxmlformats.org/presentationml/2006/main" xmlns:r="http://schemas.openxmlformats.org/officeDocument/2006/relationships">
+  <p:cSld>
+    <p:bg>
+      <p:bgPr>
+        <a:solidFill>
+          <a:srgbClr val="FFFFFF"/>
+        </a:solidFill>
+        <a:effectLst/>
+      </p:bgPr>
+    </p:bg>
+    <p:spTree>
+      <p:nvGrpSpPr>
+        <p:cNvPr id="1" name=""/>
+        <p:cNvGrpSpPr/>
+        <p:nvPr/>
+      </p:nvGrpSpPr>
+      <p:grpSpPr/>
+      <p:sp>
+        <p:nvSpPr>
+          <p:cNvPr id="2" name="Rectangle 1"/>
+          <p:cNvSpPr/>
+          <p:nvPr/>
+        </p:nvSpPr>
+        <p:spPr>
+          <a:xfrm>
+            <a:off x="0" y="0"/>
+            <a:ext cx="12191695" cy="1188720"/>
+          </a:xfrm>
+          <a:prstGeom prst="rect">
+            <a:avLst/>
+          </a:prstGeom>
+          <a:solidFill>
+            <a:srgbClr val="0C2340"/>
+          </a:solidFill>
+          <a:ln>
+            <a:noFill/>
+          </a:ln>
+          <a:effectLst/>
+        </p:spPr>
+        <p:style>
+          <a:lnRef idx="1">
+            <a:schemeClr val="accent1"/>
+          </a:lnRef>
+          <a:fillRef idx="3">
+            <a:schemeClr val="accent1"/>
+          </a:fillRef>
+          <a:effectRef idx="2">
+            <a:schemeClr val="accent1"/>
+          </a:effectRef>
+          <a:fontRef idx="minor">
+            <a:schemeClr val="lt1"/>
+          </a:fontRef>
+        </p:style>
+        <p:txBody>
+          <a:bodyPr rtlCol="0" anchor="ctr"/>
+          <a:lstStyle/>
+          <a:p>
+            <a:pPr algn="ctr"/>
+          </a:p>
+        </p:txBody>
+      </p:sp>
+      <p:sp>
+        <p:nvSpPr>
+          <p:cNvPr id="3" name="TextBox 2"/>
+          <p:cNvSpPr txBox="1"/>
+          <p:nvPr/>
+        </p:nvSpPr>
+        <p:spPr>
+          <a:xfrm>
+            <a:off x="640080" y="0"/>
+            <a:ext cx="9082735" cy="1188720"/>
+          </a:xfrm>
+          <a:prstGeom prst="rect">
+            <a:avLst/>
+          </a:prstGeom>
+          <a:noFill/>
+        </p:spPr>
+        <p:txBody>
+          <a:bodyPr wrap="square" anchor="ctr" lIns="0" rIns="0" tIns="0" bIns="0">
+            <a:spAutoFit/>
+          </a:bodyPr>
+          <a:lstStyle/>
+          <a:p>
+            <a:pPr algn="ctr"/>
+            <a:r>
+              <a:rPr sz="2600" b="1" i="0">
+                <a:solidFill>
+                  <a:srgbClr val="FFFFFF"/>
+                </a:solidFill>
+                <a:latin typeface="Calibri"/>
+              </a:rPr>
+              <a:t>Hoy no se escribe: hoy se cuenta</a:t>
+            </a:r>
+          </a:p>
+        </p:txBody>
+      </p:sp>
+      <p:sp>
+        <p:nvSpPr>
+          <p:cNvPr id="4" name="TextBox 3"/>
+          <p:cNvSpPr txBox="1"/>
+          <p:nvPr/>
+        </p:nvSpPr>
+        <p:spPr>
+          <a:xfrm>
+            <a:off x="640080" y="1691639"/>
+            <a:ext cx="10911535" cy="4617720"/>
+          </a:xfrm>
+          <a:prstGeom prst="rect">
+            <a:avLst/>
+          </a:prstGeom>
+          <a:noFill/>
+        </p:spPr>
+        <p:txBody>
+          <a:bodyPr wrap="square" anchor="t" lIns="0" rIns="0" tIns="0" bIns="0">
+            <a:spAutoFit/>
+          </a:bodyPr>
+          <a:lstStyle/>
+          <a:p>
+            <a:pPr>
+              <a:spcAft>
+                <a:spcPts val="1000"/>
+              </a:spcAft>
+            </a:pPr>
+            <a:r>
+              <a:rPr sz="1600" b="0" i="0">
+                <a:solidFill>
+                  <a:srgbClr val="2B2B2B"/>
+                </a:solidFill>
+                <a:latin typeface="Calibri"/>
+              </a:rPr>
+              <a:t>–   Cambiamos de modo. Durante todo el periodo hemos escrito; hoy cada uno va a </a:t>
+            </a:r>
+            <a:r>
+              <a:rPr sz="1600" b="1" i="0">
+                <a:solidFill>
+                  <a:srgbClr val="2B2B2B"/>
+                </a:solidFill>
+                <a:latin typeface="Calibri"/>
+              </a:rPr>
+              <a:t>hablar</a:t>
+            </a:r>
+            <a:r>
+              <a:rPr sz="1600" b="0" i="0">
+                <a:solidFill>
+                  <a:srgbClr val="2B2B2B"/>
+                </a:solidFill>
+                <a:latin typeface="Calibri"/>
+              </a:rPr>
+              <a:t> de su proyecto durante tres minutos.</a:t>
+            </a:r>
+          </a:p>
+          <a:p>
+            <a:pPr lvl="1">
+              <a:spcAft>
+                <a:spcPts val="600"/>
+              </a:spcAft>
+            </a:pPr>
+            <a:r>
+              <a:rPr sz="1500" b="0" i="0">
+                <a:solidFill>
+                  <a:srgbClr val="2B2B2B"/>
+                </a:solidFill>
+                <a:latin typeface="Calibri"/>
+              </a:rPr>
+              <a:t>●   Y va a dar y recibir retroalimentación de sus compañeros, con una fórmula concreta.</a:t>
+            </a:r>
+          </a:p>
+          <a:p>
+            <a:pPr>
+              <a:spcAft>
+                <a:spcPts val="1000"/>
+              </a:spcAft>
+            </a:pPr>
+            <a:r>
+              <a:rPr sz="1600" b="0" i="0">
+                <a:solidFill>
+                  <a:srgbClr val="2B2B2B"/>
+                </a:solidFill>
+                <a:latin typeface="Calibri"/>
+              </a:rPr>
+              <a:t>–   Por qué importa: en TG3 hay </a:t>
+            </a:r>
+            <a:r>
+              <a:rPr sz="1600" b="1" i="0">
+                <a:solidFill>
+                  <a:srgbClr val="2B2B2B"/>
+                </a:solidFill>
+                <a:latin typeface="Calibri"/>
+              </a:rPr>
+              <a:t>sustentación ante jurados</a:t>
+            </a:r>
+            <a:r>
+              <a:rPr sz="1600" b="0" i="0">
+                <a:solidFill>
+                  <a:srgbClr val="2B2B2B"/>
+                </a:solidFill>
+                <a:latin typeface="Calibri"/>
+              </a:rPr>
+              <a:t>. Este es el primer ensayo con red.</a:t>
+            </a:r>
+          </a:p>
+          <a:p>
+            <a:pPr lvl="1">
+              <a:spcAft>
+                <a:spcPts val="600"/>
+              </a:spcAft>
+            </a:pPr>
+            <a:r>
+              <a:rPr sz="1500" b="0" i="0">
+                <a:solidFill>
+                  <a:srgbClr val="2B2B2B"/>
+                </a:solidFill>
+                <a:latin typeface="Calibri"/>
+              </a:rPr>
+              <a:t>●   Público amable, tiempo corto y consecuencias bajas. Quien practica hoy llega con ventaja el próximo semestre.</a:t>
+            </a:r>
+          </a:p>
+          <a:p>
+            <a:pPr>
+              <a:spcAft>
+                <a:spcPts val="1000"/>
+              </a:spcAft>
+            </a:pPr>
+            <a:r>
+              <a:rPr sz="1600" b="0" i="0">
+                <a:solidFill>
+                  <a:srgbClr val="2B2B2B"/>
+                </a:solidFill>
+                <a:latin typeface="Calibri"/>
+              </a:rPr>
+              <a:t>–   Además, contar el proyecto en voz alta es el mejor detector de incoherencias que existe.</a:t>
+            </a:r>
+          </a:p>
+          <a:p>
+            <a:pPr lvl="1">
+              <a:spcAft>
+                <a:spcPts val="600"/>
+              </a:spcAft>
+            </a:pPr>
+            <a:r>
+              <a:rPr sz="1500" b="0" i="0">
+                <a:solidFill>
+                  <a:srgbClr val="2B2B2B"/>
+                </a:solidFill>
+                <a:latin typeface="Calibri"/>
+              </a:rPr>
+              <a:t>●   Lo que usted no logra explicar en tres minutos, casi siempre es porque todavía no está claro en el documento.</a:t>
+            </a:r>
+          </a:p>
+          <a:p>
+            <a:pPr>
+              <a:spcAft>
+                <a:spcPts val="1000"/>
+              </a:spcAft>
+            </a:pPr>
+            <a:r>
+              <a:rPr sz="1600" b="0" i="0">
+                <a:solidFill>
+                  <a:srgbClr val="2B2B2B"/>
+                </a:solidFill>
+                <a:latin typeface="Calibri"/>
+              </a:rPr>
+              <a:t>–   Regla de oro para hoy, y anótela: </a:t>
+            </a:r>
+            <a:r>
+              <a:rPr sz="1600" b="1" i="0">
+                <a:solidFill>
+                  <a:srgbClr val="2B2B2B"/>
+                </a:solidFill>
+                <a:latin typeface="Calibri"/>
+              </a:rPr>
+              <a:t>anotar todo, discutir nada</a:t>
+            </a:r>
+            <a:r>
+              <a:rPr sz="1600" b="0" i="0">
+                <a:solidFill>
+                  <a:srgbClr val="2B2B2B"/>
+                </a:solidFill>
+                <a:latin typeface="Calibri"/>
+              </a:rPr>
+              <a:t>.</a:t>
+            </a:r>
+          </a:p>
+        </p:txBody>
+      </p:sp>
+      <p:sp>
+        <p:nvSpPr>
+          <p:cNvPr id="5" name="TextBox 4"/>
+          <p:cNvSpPr txBox="1"/>
+          <p:nvPr/>
+        </p:nvSpPr>
+        <p:spPr>
+          <a:xfrm>
+            <a:off x="11094415" y="6446520"/>
+            <a:ext cx="548640" cy="274320"/>
+          </a:xfrm>
+          <a:prstGeom prst="rect">
+            <a:avLst/>
+          </a:prstGeom>
+          <a:noFill/>
+        </p:spPr>
+        <p:txBody>
+          <a:bodyPr wrap="square" anchor="t" lIns="0" rIns="0" tIns="0" bIns="0">
+            <a:spAutoFit/>
+          </a:bodyPr>
+          <a:lstStyle/>
+          <a:p>
+            <a:pPr algn="r"/>
+            <a:r>
+              <a:rPr sz="1000" b="1" i="0">
+                <a:solidFill>
+                  <a:srgbClr val="8F989D"/>
+                </a:solidFill>
+                <a:latin typeface="Calibri"/>
+              </a:rPr>
+              <a:t>2</a:t>
+            </a:r>
+          </a:p>
+        </p:txBody>
+      </p:sp>
+      <p:sp>
+        <p:nvSpPr>
+          <p:cNvPr id="6" name="TextBox 5"/>
+          <p:cNvSpPr txBox="1"/>
+          <p:nvPr/>
+        </p:nvSpPr>
+        <p:spPr>
+          <a:xfrm>
+            <a:off x="640080" y="5943600"/>
+            <a:ext cx="9997135" cy="457200"/>
+          </a:xfrm>
+          <a:prstGeom prst="rect">
+            <a:avLst/>
+          </a:prstGeom>
+          <a:noFill/>
+        </p:spPr>
+        <p:txBody>
+          <a:bodyPr wrap="square" anchor="t" lIns="0" rIns="0" tIns="0" bIns="0">
+            <a:spAutoFit/>
+          </a:bodyPr>
+          <a:lstStyle/>
+          <a:p>
+            <a:r>
+              <a:rPr sz="1200" b="0" i="1">
+                <a:solidFill>
+                  <a:srgbClr val="2B2B2B"/>
+                </a:solidFill>
+                <a:latin typeface="Calibri"/>
+              </a:rPr>
+              <a:t>Salida esperada: guion de pitch de 3 minutos escrito y notas de retroalimentación de al menos dos pares.</a:t>
+            </a:r>
+          </a:p>
+        </p:txBody>
+      </p:sp>
+    </p:spTree>
+  </p:cSld>
+  <p:clrMapOvr>
+    <a:masterClrMapping/>
+  </p:clrMapOvr>
+</p:sld>
+</file>
+
+<file path=ppt/slides/slide20.xml><?xml version="1.0" encoding="utf-8"?>
 <p:sld xmlns:a="http://schemas.openxmlformats.org/drawingml/2006/main" xmlns:p="http://schemas.openxmlformats.org/presentationml/2006/main" xmlns:r="http://schemas.openxmlformats.org/officeDocument/2006/relationships">
   <p:cSld>
     <p:bg>
@@ -6863,369 +8974,6 @@
                 <a:latin typeface="Calibri"/>
               </a:rPr>
               <a:t>TRABAJO DE GRADO 2</a:t>
-            </a:r>
-          </a:p>
-        </p:txBody>
-      </p:sp>
-    </p:spTree>
-  </p:cSld>
-  <p:clrMapOvr>
-    <a:masterClrMapping/>
-  </p:clrMapOvr>
-</p:sld>
-</file>
-
-<file path=ppt/slides/slide2.xml><?xml version="1.0" encoding="utf-8"?>
-<p:sld xmlns:a="http://schemas.openxmlformats.org/drawingml/2006/main" xmlns:p="http://schemas.openxmlformats.org/presentationml/2006/main" xmlns:r="http://schemas.openxmlformats.org/officeDocument/2006/relationships">
-  <p:cSld>
-    <p:bg>
-      <p:bgPr>
-        <a:solidFill>
-          <a:srgbClr val="FFFFFF"/>
-        </a:solidFill>
-        <a:effectLst/>
-      </p:bgPr>
-    </p:bg>
-    <p:spTree>
-      <p:nvGrpSpPr>
-        <p:cNvPr id="1" name=""/>
-        <p:cNvGrpSpPr/>
-        <p:nvPr/>
-      </p:nvGrpSpPr>
-      <p:grpSpPr/>
-      <p:sp>
-        <p:nvSpPr>
-          <p:cNvPr id="2" name="Rectangle 1"/>
-          <p:cNvSpPr/>
-          <p:nvPr/>
-        </p:nvSpPr>
-        <p:spPr>
-          <a:xfrm>
-            <a:off x="0" y="0"/>
-            <a:ext cx="12191695" cy="1188720"/>
-          </a:xfrm>
-          <a:prstGeom prst="rect">
-            <a:avLst/>
-          </a:prstGeom>
-          <a:solidFill>
-            <a:srgbClr val="0C2340"/>
-          </a:solidFill>
-          <a:ln>
-            <a:noFill/>
-          </a:ln>
-          <a:effectLst/>
-        </p:spPr>
-        <p:style>
-          <a:lnRef idx="1">
-            <a:schemeClr val="accent1"/>
-          </a:lnRef>
-          <a:fillRef idx="3">
-            <a:schemeClr val="accent1"/>
-          </a:fillRef>
-          <a:effectRef idx="2">
-            <a:schemeClr val="accent1"/>
-          </a:effectRef>
-          <a:fontRef idx="minor">
-            <a:schemeClr val="lt1"/>
-          </a:fontRef>
-        </p:style>
-        <p:txBody>
-          <a:bodyPr rtlCol="0" anchor="ctr"/>
-          <a:lstStyle/>
-          <a:p>
-            <a:pPr algn="ctr"/>
-          </a:p>
-        </p:txBody>
-      </p:sp>
-      <p:sp>
-        <p:nvSpPr>
-          <p:cNvPr id="3" name="TextBox 2"/>
-          <p:cNvSpPr txBox="1"/>
-          <p:nvPr/>
-        </p:nvSpPr>
-        <p:spPr>
-          <a:xfrm>
-            <a:off x="640080" y="0"/>
-            <a:ext cx="9082735" cy="1188720"/>
-          </a:xfrm>
-          <a:prstGeom prst="rect">
-            <a:avLst/>
-          </a:prstGeom>
-          <a:noFill/>
-        </p:spPr>
-        <p:txBody>
-          <a:bodyPr wrap="square" anchor="ctr" lIns="0" rIns="0" tIns="0" bIns="0">
-            <a:spAutoFit/>
-          </a:bodyPr>
-          <a:lstStyle/>
-          <a:p>
-            <a:pPr algn="ctr"/>
-            <a:r>
-              <a:rPr sz="2600" b="1" i="0">
-                <a:solidFill>
-                  <a:srgbClr val="FFFFFF"/>
-                </a:solidFill>
-                <a:latin typeface="Calibri"/>
-              </a:rPr>
-              <a:t>Hoy no se escribe: hoy se cuenta</a:t>
-            </a:r>
-          </a:p>
-        </p:txBody>
-      </p:sp>
-      <p:sp>
-        <p:nvSpPr>
-          <p:cNvPr id="4" name="TextBox 3"/>
-          <p:cNvSpPr txBox="1"/>
-          <p:nvPr/>
-        </p:nvSpPr>
-        <p:spPr>
-          <a:xfrm>
-            <a:off x="640080" y="1691639"/>
-            <a:ext cx="10911535" cy="4617720"/>
-          </a:xfrm>
-          <a:prstGeom prst="rect">
-            <a:avLst/>
-          </a:prstGeom>
-          <a:noFill/>
-        </p:spPr>
-        <p:txBody>
-          <a:bodyPr wrap="square" anchor="t" lIns="0" rIns="0" tIns="0" bIns="0">
-            <a:spAutoFit/>
-          </a:bodyPr>
-          <a:lstStyle/>
-          <a:p>
-            <a:pPr>
-              <a:spcAft>
-                <a:spcPts val="1000"/>
-              </a:spcAft>
-            </a:pPr>
-            <a:r>
-              <a:rPr sz="1600" b="0" i="0">
-                <a:solidFill>
-                  <a:srgbClr val="2B2B2B"/>
-                </a:solidFill>
-                <a:latin typeface="Calibri"/>
-              </a:rPr>
-              <a:t>–   Cambiamos de modo. Durante todo el periodo hemos escrito; hoy cada uno va a </a:t>
-            </a:r>
-            <a:r>
-              <a:rPr sz="1600" b="1" i="0">
-                <a:solidFill>
-                  <a:srgbClr val="2B2B2B"/>
-                </a:solidFill>
-                <a:latin typeface="Calibri"/>
-              </a:rPr>
-              <a:t>hablar</a:t>
-            </a:r>
-            <a:r>
-              <a:rPr sz="1600" b="0" i="0">
-                <a:solidFill>
-                  <a:srgbClr val="2B2B2B"/>
-                </a:solidFill>
-                <a:latin typeface="Calibri"/>
-              </a:rPr>
-              <a:t> de su proyecto durante tres minutos.</a:t>
-            </a:r>
-          </a:p>
-          <a:p>
-            <a:pPr lvl="1">
-              <a:spcAft>
-                <a:spcPts val="600"/>
-              </a:spcAft>
-            </a:pPr>
-            <a:r>
-              <a:rPr sz="1500" b="0" i="0">
-                <a:solidFill>
-                  <a:srgbClr val="2B2B2B"/>
-                </a:solidFill>
-                <a:latin typeface="Calibri"/>
-              </a:rPr>
-              <a:t>●   Y va a dar y recibir retroalimentación de sus compañeros, con una fórmula concreta.</a:t>
-            </a:r>
-          </a:p>
-          <a:p>
-            <a:pPr>
-              <a:spcAft>
-                <a:spcPts val="1000"/>
-              </a:spcAft>
-            </a:pPr>
-            <a:r>
-              <a:rPr sz="1600" b="0" i="0">
-                <a:solidFill>
-                  <a:srgbClr val="2B2B2B"/>
-                </a:solidFill>
-                <a:latin typeface="Calibri"/>
-              </a:rPr>
-              <a:t>–   Por qué importa: en TG3 hay </a:t>
-            </a:r>
-            <a:r>
-              <a:rPr sz="1600" b="1" i="0">
-                <a:solidFill>
-                  <a:srgbClr val="2B2B2B"/>
-                </a:solidFill>
-                <a:latin typeface="Calibri"/>
-              </a:rPr>
-              <a:t>sustentación ante jurados</a:t>
-            </a:r>
-            <a:r>
-              <a:rPr sz="1600" b="0" i="0">
-                <a:solidFill>
-                  <a:srgbClr val="2B2B2B"/>
-                </a:solidFill>
-                <a:latin typeface="Calibri"/>
-              </a:rPr>
-              <a:t>. Este es el primer ensayo con red.</a:t>
-            </a:r>
-          </a:p>
-          <a:p>
-            <a:pPr lvl="1">
-              <a:spcAft>
-                <a:spcPts val="600"/>
-              </a:spcAft>
-            </a:pPr>
-            <a:r>
-              <a:rPr sz="1500" b="0" i="0">
-                <a:solidFill>
-                  <a:srgbClr val="2B2B2B"/>
-                </a:solidFill>
-                <a:latin typeface="Calibri"/>
-              </a:rPr>
-              <a:t>●   Público amable, tiempo corto y consecuencias bajas. Quien practica hoy llega con ventaja el próximo semestre.</a:t>
-            </a:r>
-          </a:p>
-          <a:p>
-            <a:pPr>
-              <a:spcAft>
-                <a:spcPts val="1000"/>
-              </a:spcAft>
-            </a:pPr>
-            <a:r>
-              <a:rPr sz="1600" b="0" i="0">
-                <a:solidFill>
-                  <a:srgbClr val="2B2B2B"/>
-                </a:solidFill>
-                <a:latin typeface="Calibri"/>
-              </a:rPr>
-              <a:t>–   Además, contar el proyecto en voz alta es el mejor detector de incoherencias que existe.</a:t>
-            </a:r>
-          </a:p>
-          <a:p>
-            <a:pPr lvl="1">
-              <a:spcAft>
-                <a:spcPts val="600"/>
-              </a:spcAft>
-            </a:pPr>
-            <a:r>
-              <a:rPr sz="1500" b="0" i="0">
-                <a:solidFill>
-                  <a:srgbClr val="2B2B2B"/>
-                </a:solidFill>
-                <a:latin typeface="Calibri"/>
-              </a:rPr>
-              <a:t>●   Lo que usted no logra explicar en tres minutos, casi siempre es porque todavía no está claro en el documento.</a:t>
-            </a:r>
-          </a:p>
-          <a:p>
-            <a:pPr>
-              <a:spcAft>
-                <a:spcPts val="1000"/>
-              </a:spcAft>
-            </a:pPr>
-            <a:r>
-              <a:rPr sz="1600" b="0" i="0">
-                <a:solidFill>
-                  <a:srgbClr val="2B2B2B"/>
-                </a:solidFill>
-                <a:latin typeface="Calibri"/>
-              </a:rPr>
-              <a:t>–   Regla de oro para hoy, y anótela: </a:t>
-            </a:r>
-            <a:r>
-              <a:rPr sz="1600" b="1" i="0">
-                <a:solidFill>
-                  <a:srgbClr val="2B2B2B"/>
-                </a:solidFill>
-                <a:latin typeface="Calibri"/>
-              </a:rPr>
-              <a:t>anotar todo, discutir nada</a:t>
-            </a:r>
-            <a:r>
-              <a:rPr sz="1600" b="0" i="0">
-                <a:solidFill>
-                  <a:srgbClr val="2B2B2B"/>
-                </a:solidFill>
-                <a:latin typeface="Calibri"/>
-              </a:rPr>
-              <a:t>.</a:t>
-            </a:r>
-          </a:p>
-        </p:txBody>
-      </p:sp>
-      <p:sp>
-        <p:nvSpPr>
-          <p:cNvPr id="5" name="TextBox 4"/>
-          <p:cNvSpPr txBox="1"/>
-          <p:nvPr/>
-        </p:nvSpPr>
-        <p:spPr>
-          <a:xfrm>
-            <a:off x="11094415" y="6446520"/>
-            <a:ext cx="548640" cy="274320"/>
-          </a:xfrm>
-          <a:prstGeom prst="rect">
-            <a:avLst/>
-          </a:prstGeom>
-          <a:noFill/>
-        </p:spPr>
-        <p:txBody>
-          <a:bodyPr wrap="square" anchor="t" lIns="0" rIns="0" tIns="0" bIns="0">
-            <a:spAutoFit/>
-          </a:bodyPr>
-          <a:lstStyle/>
-          <a:p>
-            <a:pPr algn="r"/>
-            <a:r>
-              <a:rPr sz="1000" b="1" i="0">
-                <a:solidFill>
-                  <a:srgbClr val="8F989D"/>
-                </a:solidFill>
-                <a:latin typeface="Calibri"/>
-              </a:rPr>
-              <a:t>2</a:t>
-            </a:r>
-          </a:p>
-        </p:txBody>
-      </p:sp>
-      <p:sp>
-        <p:nvSpPr>
-          <p:cNvPr id="6" name="TextBox 5"/>
-          <p:cNvSpPr txBox="1"/>
-          <p:nvPr/>
-        </p:nvSpPr>
-        <p:spPr>
-          <a:xfrm>
-            <a:off x="640080" y="5943600"/>
-            <a:ext cx="9997135" cy="457200"/>
-          </a:xfrm>
-          <a:prstGeom prst="rect">
-            <a:avLst/>
-          </a:prstGeom>
-          <a:noFill/>
-        </p:spPr>
-        <p:txBody>
-          <a:bodyPr wrap="square" anchor="t" lIns="0" rIns="0" tIns="0" bIns="0">
-            <a:spAutoFit/>
-          </a:bodyPr>
-          <a:lstStyle/>
-          <a:p>
-            <a:r>
-              <a:rPr sz="1200" b="0" i="1">
-                <a:solidFill>
-                  <a:srgbClr val="2B2B2B"/>
-                </a:solidFill>
-                <a:latin typeface="Calibri"/>
-              </a:rPr>
-              <a:t>Salida esperada: guion de pitch de 3 minutos escrito y notas de retroalimentación de al menos dos pares.</a:t>
             </a:r>
           </a:p>
         </p:txBody>
